--- a/docs/Cobot_Fire_Sim_Presentation.pptx
+++ b/docs/Cobot_Fire_Sim_Presentation.pptx
@@ -49,6 +49,9 @@
     <p:sldId id="297" r:id="rId49"/>
     <p:sldId id="298" r:id="rId50"/>
     <p:sldId id="299" r:id="rId51"/>
+    <p:sldId id="300" r:id="rId52"/>
+    <p:sldId id="301" r:id="rId53"/>
+    <p:sldId id="302" r:id="rId54"/>
   </p:sldIdLst>
   <p:sldSz cx="12191695" cy="6858000" type="screen4x3"/>
   <p:notesSz cx="6858000" cy="9144000"/>
@@ -965,7 +968,7 @@
           <a:lstStyle/>
           <a:p>
             <a:r>
-              <a:t>수행 과정을 점진적 검증이 가능하도록 4개의 실행 단계로 조밀하게 나눴습니다. 기본 맵과 수동 조작을 점검하는 1단계, 물리적인 화재 구현과 관절 구동 모션을 시험하는 2단계, 비전 객체 인식 기능을 보강하는 4단계, 최종적으로 모든 제어 명령을 피드백 루프로 결합하는 5단계 자동화 루프로 시스템을 개발해 나갔습니다.</a:t>
+              <a:t>최종 런타임 시나리오인 stage5.sh의 자율 제어 과정을 5개의 구체적인 단계로 조밀하게 나눴습니다. 로봇이 스폰되고 화재가 시작되는 1단계, 개별 주행과 순찰을 전개하는 2단계, 소화기 파지와 조준 투척을 행하는 3단계, 비전 기반 조난자를 찾아 정렬 접근하는 4단계, 마지막으로 탈출로로 에스코트하여 안전 대피를 완료하는 5단계 흐름입니다.</a:t>
             </a:r>
           </a:p>
         </p:txBody>
@@ -1455,7 +1458,7 @@
           <a:lstStyle/>
           <a:p>
             <a:r>
-              <a:t>지금부터는 단계별 수행 결과와 각 단계의 트러블슈팅 사례를 본격적으로 보고드리겠습니다. 우선 첫 단추인 Stage 1의 실행 파이프라인입니다. 보시는 것과 같이 시뮬레이터 가동, 로봇 스폰, 브릿지 연결, Nav2 구동, 수동 조작 순으로 시스템 기초 동작을 가로 일직선 형태로 순차 기동 및 검증했습니다.</a:t>
+              <a:t>지금부터 최종 완전 자동화 시나리오인 run_stage5.sh의 런타임 수행 결과를 단계별로 상세히 분석하여 말씀드리겠습니다. 우선 첫 번째 단계인 로봇 스폰 및 화재 자동 점화 프로세스입니다. 보시는 바와 같이 스크립트 실행 후 시뮬레이션 환경이 기동되며 로봇 2대가 맵 원점에 스폰되고, 통신 브릿지망 활성화와 10초 대기 후 자동으로 화재 점화가 실행되는 일직선 흐름을 구현했습니다.</a:t>
             </a:r>
           </a:p>
         </p:txBody>
@@ -1525,7 +1528,7 @@
           <a:lstStyle/>
           <a:p>
             <a:r>
-              <a:t>첫 번째 주요 기능은 두 대의 로봇을 독립적으로 식별하고 제어할 수 있도록 네임스페이스를 물리적으로 구분하여 스폰한 것입니다. 또한, 로봇의 실제 물리적 골격 각도가 시뮬레이션과 ROS 2 사이에서 한 치의 오차도 없이 일치하도록, 좌표 변환을 전담하는 TF Broadcaster 브릿지 노드를 자체 구축하여 동기화했습니다.</a:t>
+              <a:t>1단계의 첫 번째 핵심 기능은 서로 다른 두 에이전트를 독립 네임스페이스를 통해 스폰하고 통신망을 수립한 것입니다. 제어 주기 200Hz의 물리 속도 명령을 UDP 브릿지를 통해 지연 없이 전달하고, 시뮬레이터 속 로봇들의 관절 골격 정보를 ROS 2 TF 트리로 완벽히 변환하는 통신 기틀을 마련했습니다.</a:t>
             </a:r>
           </a:p>
         </p:txBody>
@@ -1595,7 +1598,7 @@
           <a:lstStyle/>
           <a:p>
             <a:r>
-              <a:t>두 번째 주요 기능은 키보드를 통한 수동 원격 제어 및 Nav2 스택과의 연동 상태 테스트입니다. 사용자가 키보드로 조작하는 대로 로봇이 시뮬레이션 월드를 기민하게 주행하며, 주행 중 360도 라이다가 실시간으로 수집한 포인트 클라우드 정보가 ROS 2 내비게이션 월드에 정상 매핑되는 것을 확인했습니다.</a:t>
+              <a:t>두 번째 주요 기능은 타이머 기반 화재 점화 장치입니다. 인위적 조작 없이 시뮬레이션 시작 10초 후에 부엌 구역에 빨간 화염과 매연 파티클이 발생하도록 이미터를 활성화했고, 15초 시점부터 선형 확산 코드가 연쇄적으로 동작하여 긴박한 재난 상황의 런타임 트리거를 생성했습니다.</a:t>
             </a:r>
           </a:p>
         </p:txBody>
@@ -1665,7 +1668,7 @@
           <a:lstStyle/>
           <a:p>
             <a:r>
-              <a:t>Stage 1에서 맞닥뜨린 첫 번째 문제는 외부 맵 파일을 로드했을 때 물리 충돌 속성이 누락되어 로봇들이 스폰되자마자 바닥 밑으로 추락하는 현상이었습니다. 이를 해결하기 위해 환경 빌드 스크립트를 수정하여, 맵이 로드되는 순간 전체 3D 메시를 내부에서 탐색하고 물리 충돌 API를 런타임에 강제로 주입하여 로봇이 바닥 위를 단단히 딛고 설 수 있게 해결했습니다.</a:t>
+              <a:t>1단계 환경 로드 시 발생했던 가장 큰 문제는 외부 맵의 바닥에 물리 충돌체가 없어 로봇들이 스폰되자마자 추락하는 에러였습니다. 이를 해결하기 위해 환경 생성 코드에 바닥 메시를 포함한 맵 내부 모든 구조물을 런타임에 탐색하고 물리 API를 강제 부여하는 충돌 경계 생성 모듈을 추가하여 로봇이 정상 주행하도록 극복했습니다.</a:t>
             </a:r>
           </a:p>
         </p:txBody>
@@ -1735,7 +1738,7 @@
           <a:lstStyle/>
           <a:p>
             <a:r>
-              <a:t>다음으로 좁은 통로를 로봇이 지나가지 못하고 굳어버리는 3-1번 문제 상황입니다. 이는 라이다 센서가 계측한 벽면의 팽창 반지름이 과도하게 크게 잡혀, 경로 계획기 입장에서 갈 수 있는 길이 없다고 판단한 오작동이었습니다. 두 로봇의 내비게이션 파라미터 야믈 파일 내 인플레이션 반지름을 현장 규격에 맞게 타이트하게 조율하여 좁은 복도도 자연스럽게 빠져나가도록 수정했습니다.</a:t>
+              <a:t>두 번째 1단계 트러블슈팅은 좌표계 불일치 건입니다. 시뮬레이션 원점과 ROS 2 좌표계가 비틀려 있어 자율 주행 시 맵 매칭 오차가 누적되어 벽에 충돌하곤 했습니다. 저희는 TF 브릿지 노드 내부 연산에 쿼터니언 보정 필터를 긴급 적용하여 두 시스템 간의 3차원 위치 데이터를 빈틈없이 동기화시켰습니다.</a:t>
             </a:r>
           </a:p>
         </p:txBody>
@@ -1805,7 +1808,7 @@
           <a:lstStyle/>
           <a:p>
             <a:r>
-              <a:t>세 번째 트러블슈팅 3-3번 사례는 맵 좌표계 불일치 건입니다. 시뮬레이션의 물리 원점 좌표와 ROS 2 Nav2가 인지하는 좌표축이 미세하게 비틀려 있어 로봇이 직진을 명령해도 벽으로 돌진하곤 했습니다. 브릿지 스크립트 단에서 쿼터니언 회전 오프셋 필터를 직접 연산에 추가하여 두 환경의 물리적 방향성을 완벽하게 동기화해 주었습니다.</a:t>
+              <a:t>이어서 2단계인 다중 로봇 임무 분담 및 목적지 자율 주행 이동 단계입니다. 화재 감지 신호와 함께 두 로봇은 서로 다른 임무 목표를 부여받고 가로 일직선 흐름으로 자율 주행 및 순찰을 시작합니다.</a:t>
             </a:r>
           </a:p>
         </p:txBody>
@@ -1875,7 +1878,7 @@
           <a:lstStyle/>
           <a:p>
             <a:r>
-              <a:t>마지막 네 번째 트러블슈팅 사례는 자율 이동 시 발생하는 사족보행 로봇의 모션 불안정 현상입니다. 급격한 제어기 지시가 들어올 때 다리가 뒤엉켜 흔들리던 문제를 방지하고자, 스팟 에이전트 코드에 저역통과필터와 가속도 한계 제한기를 수식으로 구현하여 부드러운 선회 및 자율 거동 안정성을 확보하였습니다.</a:t>
+              <a:t>2단계의 첫 번째 핵심은 robot1 Spot 로봇의 소화기 방 자율 주행입니다. Spot은 화재 발생 센서의 인터럽트 신호를 받는 즉시 소화기가 생성되어 있는 목적 좌표로 경로를 생성하고, 실시간 장애물을 안전하게 우회하며 신속히 주행합니다.</a:t>
             </a:r>
           </a:p>
         </p:txBody>
@@ -1945,7 +1948,7 @@
           <a:lstStyle/>
           <a:p>
             <a:r>
-              <a:t>이어서 Stage 2 구현 파이프라인입니다. 2단계는 시뮬레이션 내에 물리적인 불꽃을 지피고, 로봇 팔로 소화기를 파지 및 투척하는 동작을 검증합니다. 점화, 확산, 소화기 등장, G키 파지, Q키 투척으로 연결되는 제어 단계를 구성하여 물리 거동을 세밀히 검증했습니다.</a:t>
+              <a:t>두 번째 주요 기능은 robot2의 순방향 자율 순찰 루프입니다. 순찰 로봇은 5번방부터 복도를 거쳐 각 방으로 순차 이동을 하되, 단순 주행에 그치지 않고 방에 들어가면 360도 제자리 스핀 액션을 자동으로 수행하여 라이다와 카메라의 수색 사각지대를 완벽히 차단하며 이동하도록 구현했습니다.</a:t>
             </a:r>
           </a:p>
         </p:txBody>
@@ -2015,7 +2018,7 @@
           <a:lstStyle/>
           <a:p>
             <a:r>
-              <a:t>2단계 주요 기능 중 첫째는 가상 공간에 화재 물리 환경을 구성한 것입니다. 10초 대기 후 가상의 발화점에서 이미터 노드를 점화시키고, 15초 시점부터 확산 파라미터가 적용되어 불길이 번집니다. 이를 통해 실제 로봇이 신속하게 움직여야 하는 임무의 시급성을 시스템적으로 구현하였습니다.</a:t>
+              <a:t>2단계 자율 주행 도중 좁은 문턱을 로봇들이 통과하지 못하고 데드락에 걸리는 3-1번 결함이 있었습니다. 확인 결과 장애물 팽창 폭이 과하게 잡혀 갈 수 있는 경로 자체가 단절된 상황이었습니다. 저희는 내비게이션 파라미터 야믈 파일의 팽창 반경을 실내 규격에 최적화하여 좁은 문틈도 부드럽게 통과하도록 해결했습니다.</a:t>
             </a:r>
           </a:p>
         </p:txBody>
@@ -2085,7 +2088,7 @@
           <a:lstStyle/>
           <a:p>
             <a:r>
-              <a:t>오늘 발표는 프로젝트 개요 및 기획 배경을 시작으로, 시스템 설계 방식, 핵심 적용 기술을 짚어본 뒤, 본 프로젝트의 정수인 단계별 구현 결과와 그 과정에서 해결한 8가지 트러블슈팅 사례를 상세히 공유해 드리겠습니다. 마지막으로 실제 구동 시연 영상과 자체 평가 및 향후 연구 방향을 공유하며 발표를 맺도록 하겠습니다.</a:t>
+              <a:t>오늘 발표는 프로젝트 개요 및 기획 배경을 시작으로, 시스템 설계 방식, 핵심 적용 기술을 짚어본 뒤, 본 프로젝트의 핵심인 stage5.sh 런타임 시나리오의 단계별 구현 결과와 그 과정에서 해결한 8가지 트러블슈팅 사례를 상세히 공유해 드리겠습니다. 마지막으로 실제 구동 시연 영상과 자체 평가 및 향후 연구 방향을 공유하며 발표를 맺도록 하겠습니다.</a:t>
             </a:r>
           </a:p>
         </p:txBody>
@@ -2155,7 +2158,7 @@
           <a:lstStyle/>
           <a:p>
             <a:r>
-              <a:t>두 번째 주요 기능은 6축 로봇 팔의 파지 및 투척 수동 제어입니다. 키보드의 G 키를 누르면 로봇 팔이 목표물 위치로 가 정교하게 집어올리고, Q 키를 누르면 어깨 및 팔 관절의 급격한 회전 토크를 실어 투척 궤적을 만들어냅니다. 이때 물리 관절 제어기를 오버라이드하여 빠른 토크 스윙을 구현했습니다.</a:t>
+              <a:t>네 번째 트러블슈팅은 사족보행 로봇이 경로 보정 시 과하게 회전하여 쓰러지던 문제입니다. 물리 엔진의 보행 주기와 ROS 제어 주기의 차이로 급격한 명령이 인가된 탓이었습니다. 에이전트 코드에 저역통과필터를 추가 설계하여 제어 신호를 완만히 연쇄 보간함으로써 모션 제어의 안정성을 크게 향상시켰습니다.</a:t>
             </a:r>
           </a:p>
         </p:txBody>
@@ -2225,7 +2228,7 @@
           <a:lstStyle/>
           <a:p>
             <a:r>
-              <a:t>Stage 2의 첫 번째 트러블슈팅은 로봇이 소화기를 잡기 위해 팔을 뻗으면 무게가 앞으로 쏠려 넘어지는 전복 현상이었습니다. 강화학습 보행 제어기가 무게 변화에 적응하지 못한 탓이었습니다. 이를 해결하기 위해 파지 진입 즉시 4개의 다리 관절 각도를 단단하게 고정시키는 레그 프리즈 기법을 설계하고, 팔 모터 강성을 일시적으로 5000까지 극대화하여 무게 균형을 견고히 잡도록 조치하였습니다.</a:t>
+              <a:t>다음으로 Spot 로봇의 소화기 파지 및 화재 진압 단계인 3단계 결과입니다. 소화기 방 도착 후 다리 고정, 기하학 그립 제어, 화점 이동, 관절 투척 스윙으로 흐르는 특수 진압 프로세스를 구현하였습니다.</a:t>
             </a:r>
           </a:p>
         </p:txBody>
@@ -2295,7 +2298,7 @@
           <a:lstStyle/>
           <a:p>
             <a:r>
-              <a:t>두 번째 트러블슈팅은 목표 구역 근처에 도달한 로봇이 마지막 몇 밀리미터의 오차를 잡기 위해 제자리에서 미친 듯이 회전하며 다음 임무로 전환하지 못하는 루프 현상이었습니다. 저희는 목표 거리 15cm 이내 진입 시 강제로 제어권을 차단하고 브레이크를 잡아주는 아이들 브레이크 로직을 이식하여 안정적으로 소화 작업을 이어가게 해결했습니다.</a:t>
+              <a:t>3단계의 첫 기능은 로봇 팔의 Grasp 강제 오버라이드입니다. Spot이 소화기 앞에 도달하면 보행용 강화학습 신경망의 팔 제어를 잠시 풀고, 픽앤플레이스 용으로 정렬된 관절 목표값을 밀어 넣어 정확히 소화기를 잡게 했습니다. 이때 소화기 질량을 버틸 수 있도록 관절 강성 제어값을 5000으로 부스팅하여 악력을 최대로 가했습니다.</a:t>
             </a:r>
           </a:p>
         </p:txBody>
@@ -2365,7 +2368,7 @@
           <a:lstStyle/>
           <a:p>
             <a:r>
-              <a:t>다음으로 비전 AI와 상태머신을 연동하는 Stage 4 구현 파이프라인입니다. 4단계는 조난자 캐릭터를 스폰한 후, 로봇2의 그리퍼 카메라 뷰를 켜고 YOLOv8 엔진을 구동하여 대상과의 상대적 각도 오차를 계산하고 접근을 판단하는 고성능 비전 제어 체계를 일직선 구조로 구성하여 검증했습니다.</a:t>
+              <a:t>두 번째 주요 기능은 소화기 조준 투척과 화재 진압입니다. 소화기를 쥔 채 화점으로 이동해, 어깨와 팔꿈치 관절 모터를 전방으로 강하게 채찍처럼 휘두르며 정점에서 소화기를 놓아 투척 궤적을 그립니다. 던져진 소화기가 화점 바닥에 충돌하면 가스 파티클과 함께 이펙트가 소멸되며 완벽히 진압을 마칩니다.</a:t>
             </a:r>
           </a:p>
         </p:txBody>
@@ -2435,7 +2438,7 @@
           <a:lstStyle/>
           <a:p>
             <a:r>
-              <a:t>4단계의 첫 번째 핵심 기능은 실감나는 조난자 3D 에셋의 다중 배치와 렌더링입니다. 가상 구획실 구석구석에 사실적인 인체 구조의 캐릭터를 위치시켜, 카메라 렌더러가 사람의 외관 특징을 풍부하게 YOLOv8 탐지 노드로 전송할 수 있는 광학적 기반을 구축하였습니다.</a:t>
+              <a:t>3단계 첫 번째 트러블슈팅은 소화기를 파지할 때 로봇이 전방 무게 하중을 견디지 못하고 전복되던 결함입니다. 보행 제어기가 급격한 질량 변화를 감당하지 못한 탓이었습니다. 이를 해결하기 위해 파지 진입 시 다리 관절의 모터 강성을 2000으로 굳히고 고정 스탠스를 유지하는 레그 프리즈 모듈을 이식하여 안정성을 잡았습니다.</a:t>
             </a:r>
           </a:p>
         </p:txBody>
@@ -2505,7 +2508,7 @@
           <a:lstStyle/>
           <a:p>
             <a:r>
-              <a:t>두 번째 주요 기능은 실시간 YOLOv8 인명 탐지 및 정렬 피드백입니다. 그리퍼 카메라 영상이 실시간으로 추론 엔진을 거치며 인명을 감지하고, 화면 중심과의 좌우 오차 픽셀을 측정하여 정밀 비례 제어로 로봇의 방향을 조난자 정면으로 고정합니다. 이 정렬각 오차가 0.1 라디안 이하가 되면 접근 단계로 진입하게 됩니다.</a:t>
+              <a:t>다음으로 목표지에 거의 다 온 로봇이 제자리에서 멈추지 못하고 빙글빙글 도는 3-2번 현상입니다. 허용 오차가 너무 타이트하여 제어기가 계속 반응한 오작동이었습니다. 타겟 15cm 이내로 들어오면 강제 제동을 걸고 모터를 완전히 차단해 버리는 아이들 브레이크 코드를 보태어 깔끔하게 진압 단계로의 이행을 매끄럽게 처리했습니다.</a:t>
             </a:r>
           </a:p>
         </p:txBody>
@@ -2575,7 +2578,7 @@
           <a:lstStyle/>
           <a:p>
             <a:r>
-              <a:t>4단계의 핵심 트러블슈팅 사례인 비전 센서 프레임 유실 대책입니다. 이미지 중심점의 깊이 버퍼가 순간적으로 깨지면 제어 코드가 에러를 뿜으며 멈췄었습니다. 저희는 이 비전 버퍼 수집 실패 상황을 대비해, 물리 시뮬레이션 상에서 다이렉트로 벽이나 대상을 관통해 거리를 재는 가상 레이캐스팅 메소드를 백업으로 즉각 호출하게 이중화함으로써 탐색의 신뢰도를 월등히 높였습니다.</a:t>
+              <a:t>4단계는 순찰 로봇의 YOLOv8 비전 인명 탐지 및 정면 정렬 접근 단계입니다. 카메라 영상을 실시간으로 추론하여 사람을 찾고, 오차 픽셀에 맞춰 몸을 정면으로 정렬하여 1.15m 안전 거리까지 접근하는 자율 비전 루프를 설계하여 완성했습니다.</a:t>
             </a:r>
           </a:p>
         </p:txBody>
@@ -2645,7 +2648,7 @@
           <a:lstStyle/>
           <a:p>
             <a:r>
-              <a:t>최종 완성형 단계인 Stage 5 실행 파이프라인입니다. 5단계에서는 로봇의 모든 수동 조작을 배제하고 완전 무인 자동 모드로 동작합니다. 화재 감지 및 자동 진압, 조난자 자동 추적 및 호송 유도, 그리고 최종 출구로의 안전 탈출까지 전 과정을 가로 일직선 흐름으로 완벽히 통합 구동시켰습니다.</a:t>
+              <a:t>4단계 첫 번째 기능은 실시간 YOLOv8 기반의 인명 감지입니다. 그리퍼 끝단에 장착된 RGB 카메라 뷰를 딥러닝 엔진에 물려 25밀리초 수준의 초고속 속도로 대상을 탐지합니다. 방 문턱이나 장애물 뒤에 쓰러진 조난자를 오인 없이 잡아내기 위해 최적의 판단 감도인 0.35를 부여하였습니다.</a:t>
             </a:r>
           </a:p>
         </p:txBody>
@@ -2715,7 +2718,7 @@
           <a:lstStyle/>
           <a:p>
             <a:r>
-              <a:t>5단계의 첫 번째 핵심은 사족보행 로봇 Spot의 완전 자율 소화 시퀀스입니다. 소화기가 있는 방으로 내비게이션 주행을 완수한 뒤 자동으로 팔을 뻗어 물건을 집고, 즉시 화재가 발생한 방으로 이동하여 1.5m 지점에서 조준 투척을 행합니다. 불길이 잡히면 즉시 회차하여 탈출로로 스스로 이동합니다.</a:t>
+              <a:t>두 번째 주요 기능은 조난자 방향으로의 비례제어 정렬과 정밀 접근입니다. 탐지 박스 중심점의 좌우 오프셋을 역계산해 로봇 회전 속도로 매핑하는 P제어 방식을 썼습니다. 로봇이 오차 0.1 라디안 이하로 정렬을 끝마치면 직진 가속하여 조난자 앞 1.15m 지점까지 안전하게 정밀 진입합니다.</a:t>
             </a:r>
           </a:p>
         </p:txBody>
@@ -2785,7 +2788,7 @@
           <a:lstStyle/>
           <a:p>
             <a:r>
-              <a:t>두 번째 핵심은 순찰 로봇의 자율 구조 시나리오입니다. 1번부터 6번 구역까지 구석구석을 돌며 라이다와 카메라로 순찰을 돌다가 조난자를 감지하면 즉시 순찰을 정지합니다. 이후 조난자를 로봇 후방 2.4m 위치에 안전하게 픽스한 채, 출구까지 자율 주행으로 조난자를 에스코트하는 인공지능 호송 기능을 구현하였습니다.</a:t>
+              <a:t>4단계 핵심 트러블슈팅 사례인 비전 데이터 드롭 대비책입니다. 순간적인 카메라 통신 오류로 깊이 데이터 수집이 끊기면 주행 코드가 에러를 내며 로봇이 복도에 고정되곤 했습니다. 저희는 깊이 맵이 깨지면 물리 엔진 상에서 가상의 탐색 광선(Raycast)을 쏘아 조난자 거리를 즉시 역계산하는 Fallback 구조를 설계하여 제어 연속성을 확보했습니다.</a:t>
             </a:r>
           </a:p>
         </p:txBody>
@@ -2925,7 +2928,7 @@
           <a:lstStyle/>
           <a:p>
             <a:r>
-              <a:t>5단계 통합 과정에서 발견된 치명적인 문제는 통신 병목으로 인해 Nav2 액션 서버의 완료 응답이 유실되면 로봇이 그 자리에 영원히 서 있게 되는 데드락 현상이었습니다. 저희는 8초간 피드백이 없으면 기존 전송한 명령을 취소하고 목표지를 재발행하는 비동기 타임아웃 감시 스레드를 탑재하여, 어떠한 무거운 연산 지연 상황에서도 로봇이 멈추지 않고 끝까지 임무를 완수하도록 보완했습니다.</a:t>
+              <a:t>마지막 5단계인 조난자 후방 에스코트 유도 및 안전지대 동시 대피 단계입니다. 대피 도중 조난자가 로봇의 라이다 센서 경로를 가로막는 문제를 해결하고, 최종 출구 좌표로 이동하여 안전하게 시뮬레이션을 정지하는 최종 통합 흐름을 구축했습니다.</a:t>
             </a:r>
           </a:p>
         </p:txBody>
@@ -2995,7 +2998,7 @@
           <a:lstStyle/>
           <a:p>
             <a:r>
-              <a:t>백문이 불여일견입니다. 준비된 통합 시연 영상을 감상하시겠습니다. 영상 전반부에서는 Isaac Sim 공간에 로봇이 정확히 스폰되어 수동 주행 테스트와 맵핑을 수행하고, 화재가 발생함에 따라 Spot 로봇이 소화기를 안전하게 파지 및 투척하여 초기 화재를 진압하는 모습을 보실 수 있습니다. 후반부에서는 순찰 로봇이 룸 패트롤 중 YOLOv8 모델로 조난자를 즉각 식별하고, 비전 정렬 후 조난자를 동적으로 출구까지 밀착 에스코트하며 로봇 2대 모두 탈출에 성공하여 안전하게 정지하는 전 과정의 완전 자율 통합 시나리오를 감상하실 수 있습니다.</a:t>
+              <a:t>5단계 첫 기능은 에스코트 도중 발생하는 Stuck 현상 극복입니다. 조난자가 로봇 뒤에 서면 라이다 센서가 이를 벽이나 장애물로 착각해 Costmap 영역을 부풀려 로봇이 길을 잃고 맴돌게 됩니다. 이에 따라 에스코트 모드가 켜지는 즉시 조난자의 물리 충돌 속성을 차단해 라이다 빔이 통과하도록 하고, Costmap 비우기 서비스를 동적으로 호출해 경로를 즉시 다시 뚫었습니다.</a:t>
             </a:r>
           </a:p>
         </p:txBody>
@@ -3065,7 +3068,7 @@
           <a:lstStyle/>
           <a:p>
             <a:r>
-              <a:t>이번 프로젝트를 마치고 도출한 기술적 개선점과 향후 발전 방향입니다. 물리적 한계로는 소화기 투척 시 잔여 마찰력을 상쇄시킬 API 변환, 화재 연기로 인한 라이다 노이즈 칼만 필터링이 요구됩니다. 또한 중량물을 들 때 다리 관절 부하를 줄이기 위한 질량 적응형 강화학습 훈련과 통신 동기화 클록 보정을 향후 개선 과제로 삼았습니다. 이를 토대로 최종 실물 로봇에 이식하는 Sim-to-Real 실증, 동적 협동을 구현하는 다중 강화학습, 5G 기반 클라우드 대시보드 통합으로 발전시켜 나갈 계획입니다.</a:t>
+              <a:t>두 번째 주요 기능은 조난자 동반 대피 및 타임라인 자동 일시정지입니다. 에스코트 주행 중 조난자가 로봇 뒤 2.4m 거리를 유지하며 자연스레 호송되는 비주얼을 시뮬레이터 상에 완성했고, 두 로봇이 최종 출구 지점에 진입하면 속도를 즉시 차단하고 물리 엔진을 Pause 시켜 안전하게 무인 임무를 성공 종결하도록 자동화했습니다.</a:t>
             </a:r>
           </a:p>
         </p:txBody>
@@ -3135,7 +3138,7 @@
           <a:lstStyle/>
           <a:p>
             <a:r>
-              <a:t>이번 프로젝트의 성과와 한계입니다. 성과 측면에서는 사람 개입 없는 100% 자율 시나리오 완성, 개발 장벽이었던 8대 기술 결함 돌파, 그리고 8개의 상세 시각화 다이어그램을 깃허브에 기여한 것을 꼽을 수 있습니다. 반면, 조난자의 헬스케어 진단 부재, 번지는 화염의 실시간 코스트맵 반영 연산 속도 저하, 소화기 1대에만 의존하는 단일 실패점 구조는 프로젝트의 한계로 남아 향후 과제에서 개선할 예정입니다.</a:t>
+              <a:t>마지막 5단계 트러블슈팅은 네트워크 과부하로 인한 Nav2 서버 응답 누락 결함입니다. 피드백이 끊겨 로봇이 길에서 멈추던 데드락을 해결하기 위해, 비동기 감시 스레드를 신설하여 8초간 목표 반응이 없으면 전송했던 명령을 폐기하고 즉시 목적 좌표를 다시 쏘는 재시도 루틴을 적용하여 어떠한 상황에서도 멈추지 않는 로봇 시스템을 완성했습니다.</a:t>
             </a:r>
           </a:p>
         </p:txBody>
@@ -3205,6 +3208,216 @@
           <a:lstStyle/>
           <a:p>
             <a:r>
+              <a:t>백문이 불여일견입니다. 준비된 통합 시연 영상을 감상하시겠습니다. 영상 전반부에서는 Isaac Sim 공간에 로봇이 정확히 스폰되어 수동 주행 테스트와 맵핑을 수행하고, 화재가 발생함에 따라 Spot 로봇이 소화기를 안전하게 파지 및 투척하여 초기 화재를 진압하는 모습을 보실 수 있습니다. 후반부에서는 순찰 로봇이 룸 패트롤 중 YOLOv8 모델로 조난자를 즉각 식별하고, 비전 정렬 후 조난자를 동적으로 출구까지 밀착 에스코트하며 로봇 2대 모두 탈출에 성공하여 안전하게 정지하는 전 과정의 완전 자율 통합 시나리오를 감상하실 수 있습니다.</a:t>
+            </a:r>
+          </a:p>
+        </p:txBody>
+      </p:sp>
+      <p:sp>
+        <p:nvSpPr>
+          <p:cNvPr id="4" name="Slide Number Placeholder 3"/>
+          <p:cNvSpPr>
+            <a:spLocks noGrp="1"/>
+          </p:cNvSpPr>
+          <p:nvPr>
+            <p:ph type="sldNum" idx="5" sz="quarter"/>
+          </p:nvPr>
+        </p:nvSpPr>
+        <p:spPr/>
+      </p:sp>
+    </p:spTree>
+  </p:cSld>
+  <p:clrMapOvr>
+    <a:masterClrMapping/>
+  </p:clrMapOvr>
+</p:notes>
+</file>
+
+<file path=ppt/notesSlides/notesSlide45.xml><?xml version="1.0" encoding="utf-8"?>
+<p:notes xmlns:a="http://schemas.openxmlformats.org/drawingml/2006/main" xmlns:p="http://schemas.openxmlformats.org/presentationml/2006/main" xmlns:r="http://schemas.openxmlformats.org/officeDocument/2006/relationships">
+  <p:cSld>
+    <p:spTree>
+      <p:nvGrpSpPr>
+        <p:cNvPr id="1" name=""/>
+        <p:cNvGrpSpPr/>
+        <p:nvPr/>
+      </p:nvGrpSpPr>
+      <p:grpSpPr>
+        <a:xfrm>
+          <a:off x="0" y="0"/>
+          <a:ext cx="0" cy="0"/>
+          <a:chOff x="0" y="0"/>
+          <a:chExt cx="0" cy="0"/>
+        </a:xfrm>
+      </p:grpSpPr>
+      <p:sp>
+        <p:nvSpPr>
+          <p:cNvPr id="2" name="Slide Image Placeholder 1"/>
+          <p:cNvSpPr>
+            <a:spLocks noGrp="1"/>
+          </p:cNvSpPr>
+          <p:nvPr>
+            <p:ph type="sldImg" idx="2"/>
+          </p:nvPr>
+        </p:nvSpPr>
+        <p:spPr/>
+      </p:sp>
+      <p:sp>
+        <p:nvSpPr>
+          <p:cNvPr id="3" name="Notes Placeholder 2"/>
+          <p:cNvSpPr>
+            <a:spLocks noGrp="1"/>
+          </p:cNvSpPr>
+          <p:nvPr>
+            <p:ph type="body" idx="3" sz="quarter"/>
+          </p:nvPr>
+        </p:nvSpPr>
+        <p:spPr/>
+        <p:txBody>
+          <a:bodyPr/>
+          <a:lstStyle/>
+          <a:p>
+            <a:r>
+              <a:t>이번 프로젝트를 마치고 도출한 기술적 개선점과 향후 발전 방향입니다. 물리적 한계로는 소화기 투척 시 잔여 마찰력을 상쇄시킬 API 변환, 화재 연기로 인한 라이다 노이즈 칼만 필터링이 요구됩니다. 또한 중량물을 들 때 다리 관절 부하를 줄이기 위한 질량 적응형 강화학습 훈련과 통신 동기화 클록 보정을 향후 개선 과제로 삼았습니다. 이를 토대로 최종 실물 로봇에 이식하는 Sim-to-Real 실증, 동적 협동을 구현하는 다중 강화학습, 5G 기반 클라우드 대시보드 통합으로 발전시켜 나갈 계획입니다.</a:t>
+            </a:r>
+          </a:p>
+        </p:txBody>
+      </p:sp>
+      <p:sp>
+        <p:nvSpPr>
+          <p:cNvPr id="4" name="Slide Number Placeholder 3"/>
+          <p:cNvSpPr>
+            <a:spLocks noGrp="1"/>
+          </p:cNvSpPr>
+          <p:nvPr>
+            <p:ph type="sldNum" idx="5" sz="quarter"/>
+          </p:nvPr>
+        </p:nvSpPr>
+        <p:spPr/>
+      </p:sp>
+    </p:spTree>
+  </p:cSld>
+  <p:clrMapOvr>
+    <a:masterClrMapping/>
+  </p:clrMapOvr>
+</p:notes>
+</file>
+
+<file path=ppt/notesSlides/notesSlide46.xml><?xml version="1.0" encoding="utf-8"?>
+<p:notes xmlns:a="http://schemas.openxmlformats.org/drawingml/2006/main" xmlns:p="http://schemas.openxmlformats.org/presentationml/2006/main" xmlns:r="http://schemas.openxmlformats.org/officeDocument/2006/relationships">
+  <p:cSld>
+    <p:spTree>
+      <p:nvGrpSpPr>
+        <p:cNvPr id="1" name=""/>
+        <p:cNvGrpSpPr/>
+        <p:nvPr/>
+      </p:nvGrpSpPr>
+      <p:grpSpPr>
+        <a:xfrm>
+          <a:off x="0" y="0"/>
+          <a:ext cx="0" cy="0"/>
+          <a:chOff x="0" y="0"/>
+          <a:chExt cx="0" cy="0"/>
+        </a:xfrm>
+      </p:grpSpPr>
+      <p:sp>
+        <p:nvSpPr>
+          <p:cNvPr id="2" name="Slide Image Placeholder 1"/>
+          <p:cNvSpPr>
+            <a:spLocks noGrp="1"/>
+          </p:cNvSpPr>
+          <p:nvPr>
+            <p:ph type="sldImg" idx="2"/>
+          </p:nvPr>
+        </p:nvSpPr>
+        <p:spPr/>
+      </p:sp>
+      <p:sp>
+        <p:nvSpPr>
+          <p:cNvPr id="3" name="Notes Placeholder 2"/>
+          <p:cNvSpPr>
+            <a:spLocks noGrp="1"/>
+          </p:cNvSpPr>
+          <p:nvPr>
+            <p:ph type="body" idx="3" sz="quarter"/>
+          </p:nvPr>
+        </p:nvSpPr>
+        <p:spPr/>
+        <p:txBody>
+          <a:bodyPr/>
+          <a:lstStyle/>
+          <a:p>
+            <a:r>
+              <a:t>이번 프로젝트의 성과와 한계입니다. 성과 측면에서는 사람 개입 없는 100% 자율 시나리오 완성, 개발 장벽이었던 8대 기술 결함 돌파, 그리고 8개의 상세 시각화 다이어그램을 깃허브에 기여한 것을 꼽을 수 있습니다. 반면, 조난자의 헬스케어 진단 부재, 번지는 화염의 실시간 코스트맵 반영 연산 속도 저하, 소화기 1대에만 의존하는 단일 실패점 구조는 프로젝트의 한계로 남아 향후 과제에서 개선할 예정입니다.</a:t>
+            </a:r>
+          </a:p>
+        </p:txBody>
+      </p:sp>
+      <p:sp>
+        <p:nvSpPr>
+          <p:cNvPr id="4" name="Slide Number Placeholder 3"/>
+          <p:cNvSpPr>
+            <a:spLocks noGrp="1"/>
+          </p:cNvSpPr>
+          <p:nvPr>
+            <p:ph type="sldNum" idx="5" sz="quarter"/>
+          </p:nvPr>
+        </p:nvSpPr>
+        <p:spPr/>
+      </p:sp>
+    </p:spTree>
+  </p:cSld>
+  <p:clrMapOvr>
+    <a:masterClrMapping/>
+  </p:clrMapOvr>
+</p:notes>
+</file>
+
+<file path=ppt/notesSlides/notesSlide47.xml><?xml version="1.0" encoding="utf-8"?>
+<p:notes xmlns:a="http://schemas.openxmlformats.org/drawingml/2006/main" xmlns:p="http://schemas.openxmlformats.org/presentationml/2006/main" xmlns:r="http://schemas.openxmlformats.org/officeDocument/2006/relationships">
+  <p:cSld>
+    <p:spTree>
+      <p:nvGrpSpPr>
+        <p:cNvPr id="1" name=""/>
+        <p:cNvGrpSpPr/>
+        <p:nvPr/>
+      </p:nvGrpSpPr>
+      <p:grpSpPr>
+        <a:xfrm>
+          <a:off x="0" y="0"/>
+          <a:ext cx="0" cy="0"/>
+          <a:chOff x="0" y="0"/>
+          <a:chExt cx="0" cy="0"/>
+        </a:xfrm>
+      </p:grpSpPr>
+      <p:sp>
+        <p:nvSpPr>
+          <p:cNvPr id="2" name="Slide Image Placeholder 1"/>
+          <p:cNvSpPr>
+            <a:spLocks noGrp="1"/>
+          </p:cNvSpPr>
+          <p:nvPr>
+            <p:ph type="sldImg" idx="2"/>
+          </p:nvPr>
+        </p:nvSpPr>
+        <p:spPr/>
+      </p:sp>
+      <p:sp>
+        <p:nvSpPr>
+          <p:cNvPr id="3" name="Notes Placeholder 2"/>
+          <p:cNvSpPr>
+            <a:spLocks noGrp="1"/>
+          </p:cNvSpPr>
+          <p:nvPr>
+            <p:ph type="body" idx="3" sz="quarter"/>
+          </p:nvPr>
+        </p:nvSpPr>
+        <p:spPr/>
+        <p:txBody>
+          <a:bodyPr/>
+          <a:lstStyle/>
+          <a:p>
+            <a:r>
               <a:t>이것으로 저희 Antigravity 팀의 발표를 모두 마치겠습니다. 끝까지 경청해 주셔서 대단히 감사합니다. 지금부터 질문이 있으시다면 성실히 답변해 드리도록 하겠습니다. 감사합니다.</a:t>
             </a:r>
           </a:p>
@@ -3555,7 +3768,7 @@
           <a:lstStyle/>
           <a:p>
             <a:r>
-              <a:t>수행 절차는 기획 및 기초 환경 구성에서 시작하여 ROS 2 통신망 구축, 개별 컴포넌트 고도화, 그리고 시나리오별 통합 디버깅 단계를 거쳐 최종 검증에 이르기까지 점진적이고 체계적인 이터레이션을 수행하였습니다. 특히 4단계의 시나리오별 실행 및 디버깅을 통해 실전 완성도를 끌어올렸습니다.</a:t>
+              <a:t>수행 절차는 기획 및 기초 환경 구성에서 시작하여 ROS 2 통신망 구축, 개별 컴포넌트 고도화, 그리고 시나리오별 통합 디버깅 단계를 거쳐 최종 검증에 이르기까지 점진적이고 체계적인 이터레이션을 수행하였습니다. 특히 4단계의 stage5.sh 시나리오 런타임 검증을 통해 실전 완성도를 끌어올렸습니다.</a:t>
             </a:r>
           </a:p>
         </p:txBody>
@@ -7533,55 +7746,71 @@
               </a:defRPr>
             </a:pPr>
             <a:r>
-              <a:t>**Stage 1 (동작 확인)**: 맵 로드, 통신 브릿지 가동, 수동 주행 테스트</a:t>
-            </a:r>
-          </a:p>
-          <a:p>
-            <a:pPr lvl="1">
-              <a:spcAft>
-                <a:spcPts val="1000"/>
-              </a:spcAft>
-              <a:defRPr sz="1500">
-                <a:solidFill>
-                  <a:srgbClr val="B4B4B9"/>
-                </a:solidFill>
-                <a:latin typeface="맑은 고딕"/>
-              </a:defRPr>
-            </a:pPr>
-            <a:r>
-              <a:t>**Stage 2 (화재/수동)**: 10초 점화/15초 확산 메커니즘, Grasp/Throw 관절 상태 강제 오버라이드 검증</a:t>
-            </a:r>
-          </a:p>
-          <a:p>
-            <a:pPr lvl="1">
-              <a:spcAft>
-                <a:spcPts val="1000"/>
-              </a:spcAft>
-              <a:defRPr sz="1500">
-                <a:solidFill>
-                  <a:srgbClr val="B4B4B9"/>
-                </a:solidFill>
-                <a:latin typeface="맑은 고딕"/>
-              </a:defRPr>
-            </a:pPr>
-            <a:r>
-              <a:t>**Stage 4 (비전 연동)**: yolov8n 모델 로드, Gripper View 디스플레이, 조난자 바운딩 박스 생성</a:t>
-            </a:r>
-          </a:p>
-          <a:p>
-            <a:pPr lvl="1">
-              <a:spcAft>
-                <a:spcPts val="1000"/>
-              </a:spcAft>
-              <a:defRPr sz="1500">
-                <a:solidFill>
-                  <a:srgbClr val="B4B4B9"/>
-                </a:solidFill>
-                <a:latin typeface="맑은 고딕"/>
-              </a:defRPr>
-            </a:pPr>
-            <a:r>
-              <a:t>**Stage 5 (최종 자동화)**: RL 균형 정책과 Nav2 자율주행의 통합, 2대 로봇 협동 탈출 루프</a:t>
+              <a:t>**Stage 1 (스폰 &amp; 점화)**: 맵 로드, 통신 브릿지 가동, 10초 강제 점화 발생</a:t>
+            </a:r>
+          </a:p>
+          <a:p>
+            <a:pPr lvl="1">
+              <a:spcAft>
+                <a:spcPts val="1000"/>
+              </a:spcAft>
+              <a:defRPr sz="1500">
+                <a:solidFill>
+                  <a:srgbClr val="B4B4B9"/>
+                </a:solidFill>
+                <a:latin typeface="맑은 고딕"/>
+              </a:defRPr>
+            </a:pPr>
+            <a:r>
+              <a:t>**Stage 2 (임무이동 &amp; 순찰)**: robot1 소화기 방 이동, robot2 순환 순찰 루프</a:t>
+            </a:r>
+          </a:p>
+          <a:p>
+            <a:pPr lvl="1">
+              <a:spcAft>
+                <a:spcPts val="1000"/>
+              </a:spcAft>
+              <a:defRPr sz="1500">
+                <a:solidFill>
+                  <a:srgbClr val="B4B4B9"/>
+                </a:solidFill>
+                <a:latin typeface="맑은 고딕"/>
+              </a:defRPr>
+            </a:pPr>
+            <a:r>
+              <a:t>**Stage 3 (파지 &amp; 진압)**: Spot 다리 관절 고정 및 소화기 파지, 화점 투척 진압</a:t>
+            </a:r>
+          </a:p>
+          <a:p>
+            <a:pPr lvl="1">
+              <a:spcAft>
+                <a:spcPts val="1000"/>
+              </a:spcAft>
+              <a:defRPr sz="1500">
+                <a:solidFill>
+                  <a:srgbClr val="B4B4B9"/>
+                </a:solidFill>
+                <a:latin typeface="맑은 고딕"/>
+              </a:defRPr>
+            </a:pPr>
+            <a:r>
+              <a:t>**Stage 4 (인명탐지 &amp; 정렬)**: yolov8n 실시간 조난자 감지, 회전 정렬 및 근접 밀착</a:t>
+            </a:r>
+          </a:p>
+          <a:p>
+            <a:pPr lvl="1">
+              <a:spcAft>
+                <a:spcPts val="1000"/>
+              </a:spcAft>
+              <a:defRPr sz="1500">
+                <a:solidFill>
+                  <a:srgbClr val="B4B4B9"/>
+                </a:solidFill>
+                <a:latin typeface="맑은 고딕"/>
+              </a:defRPr>
+            </a:pPr>
+            <a:r>
+              <a:t>**Stage 5 (에스코트 &amp; 탈출)**: 조난자 충돌체 해제, 후방 동적 텔레포트, 출구 동시 탈출 완료</a:t>
             </a:r>
           </a:p>
         </p:txBody>
@@ -8505,7 +8734,7 @@
               </a:defRPr>
             </a:pPr>
             <a:r>
-              <a:t>Slide 21: Stage 1: 로봇 기본 동작 및 주행 통신 파이프라인</a:t>
+              <a:t>Slide 21: Stage 1: 로봇 스폰 및 화재 자동 점화</a:t>
             </a:r>
           </a:p>
         </p:txBody>
@@ -8544,23 +8773,23 @@
               </a:defRPr>
             </a:pPr>
             <a:r>
-              <a:t>**동작 단계**: 시뮬레이션 물리 기동 및 기초 제어 인프라 확립 단계</a:t>
-            </a:r>
-          </a:p>
-          <a:p>
-            <a:pPr lvl="1">
-              <a:spcAft>
-                <a:spcPts val="1000"/>
-              </a:spcAft>
-              <a:defRPr sz="1500">
-                <a:solidFill>
-                  <a:srgbClr val="B4B4B9"/>
-                </a:solidFill>
-                <a:latin typeface="맑은 고딕"/>
-              </a:defRPr>
-            </a:pPr>
-            <a:r>
-              <a:t>**목표**: ROS 2와의 양방향 통신 바인딩 및 라이다 센서 데이터 피드 백 수신 검증</a:t>
+              <a:t>**런타임 시작 단계**: 다중 에이전트 생성 및 기초 물리 환경 활성화</a:t>
+            </a:r>
+          </a:p>
+          <a:p>
+            <a:pPr lvl="1">
+              <a:spcAft>
+                <a:spcPts val="1000"/>
+              </a:spcAft>
+              <a:defRPr sz="1500">
+                <a:solidFill>
+                  <a:srgbClr val="B4B4B9"/>
+                </a:solidFill>
+                <a:latin typeface="맑은 고딕"/>
+              </a:defRPr>
+            </a:pPr>
+            <a:r>
+              <a:t>**동작 가이드**: 10초 대기 타이머 감지 ➔ 주방 가스레인지 발화점 화재 emitter 구동</a:t>
             </a:r>
           </a:p>
         </p:txBody>
@@ -8622,7 +8851,7 @@
               </a:defRPr>
             </a:pPr>
             <a:r>
-              <a:t>Slide 22: Stage 1 주요 기능: 에셋 스폰 &amp; TF Tree</a:t>
+              <a:t>Slide 22: Stage 1 주요 기능: 에이전트 스폰 &amp; ROS2 브릿지</a:t>
             </a:r>
           </a:p>
         </p:txBody>
@@ -8661,23 +8890,23 @@
               </a:defRPr>
             </a:pPr>
             <a:r>
-              <a:t>**다중 로봇 네임스페이스 분리**: `robot1/` 및 `robot2/` 접두어를 붙여 오돔 및 링크 충돌 방지</a:t>
-            </a:r>
-          </a:p>
-          <a:p>
-            <a:pPr lvl="1">
-              <a:spcAft>
-                <a:spcPts val="1000"/>
-              </a:spcAft>
-              <a:defRPr sz="1500">
-                <a:solidFill>
-                  <a:srgbClr val="B4B4B9"/>
-                </a:solidFill>
-                <a:latin typeface="맑은 고딕"/>
-              </a:defRPr>
-            </a:pPr>
-            <a:r>
-              <a:t>**TF Broadcaster**: `pose_file_to_ros_bridge.py`를 활용하여 Isaac Sim 내 로봇 위치를 ROS 2 TF 트리로 실시간 동기화</a:t>
+              <a:t>**다중 네임스페이스 격리**: `robot1` (진압용 Spot), `robot2` (순찰용 바퀴형 로봇) 각각 독립 네임스페이스 부여</a:t>
+            </a:r>
+          </a:p>
+          <a:p>
+            <a:pPr lvl="1">
+              <a:spcAft>
+                <a:spcPts val="1000"/>
+              </a:spcAft>
+              <a:defRPr sz="1500">
+                <a:solidFill>
+                  <a:srgbClr val="B4B4B9"/>
+                </a:solidFill>
+                <a:latin typeface="맑은 고딕"/>
+              </a:defRPr>
+            </a:pPr>
+            <a:r>
+              <a:t>**양방향 브릿지 활성화**: `cmd_vel_udp_bridge.py` 및 `pose_file_to_ros_bridge.py`가 구동되어 고주파 제어 토크와 TF 트리 연동</a:t>
             </a:r>
           </a:p>
         </p:txBody>
@@ -8739,7 +8968,7 @@
               </a:defRPr>
             </a:pPr>
             <a:r>
-              <a:t>Slide 23: Stage 1 주요 기능: Nav2 &amp; Keyboard Control</a:t>
+              <a:t>Slide 23: Stage 1 주요 기능: 강제 점화 및 확산 타이머</a:t>
             </a:r>
           </a:p>
         </p:txBody>
@@ -8778,23 +9007,23 @@
               </a:defRPr>
             </a:pPr>
             <a:r>
-              <a:t>**텔레오퍼레이션**: 키보드 방향키를 사용하여 로봇에 선속도/각속도 명령 직접 인가</a:t>
-            </a:r>
-          </a:p>
-          <a:p>
-            <a:pPr lvl="1">
-              <a:spcAft>
-                <a:spcPts val="1000"/>
-              </a:spcAft>
-              <a:defRPr sz="1500">
-                <a:solidFill>
-                  <a:srgbClr val="B4B4B9"/>
-                </a:solidFill>
-                <a:latin typeface="맑은 고딕"/>
-              </a:defRPr>
-            </a:pPr>
-            <a:r>
-              <a:t>**Nav2 스택 연결**: 로봇이 수동 주행하는 동안 센서 정보가 정상 수집되어 맵 상에 로봇 위치가 보정되는지 검증</a:t>
+              <a:t>**OmniGraph 파티클 이미터**: 가상의 불꽃 이미터 속성을 동적으로 온/오프</a:t>
+            </a:r>
+          </a:p>
+          <a:p>
+            <a:pPr lvl="1">
+              <a:spcAft>
+                <a:spcPts val="1000"/>
+              </a:spcAft>
+              <a:defRPr sz="1500">
+                <a:solidFill>
+                  <a:srgbClr val="B4B4B9"/>
+                </a:solidFill>
+                <a:latin typeface="맑은 고딕"/>
+              </a:defRPr>
+            </a:pPr>
+            <a:r>
+              <a:t>**확산 파라미터 제어**: 시간 경과에 따른 불꽃 밀도 및 확산 속도 변수 제어 탑재</a:t>
             </a:r>
           </a:p>
         </p:txBody>
@@ -8856,7 +9085,7 @@
               </a:defRPr>
             </a:pPr>
             <a:r>
-              <a:t>Slide 24: [Troubleshooting 1] 외부 USDZ 맵 물리 충돌 모델링 누락</a:t>
+              <a:t>Slide 24: [Troubleshooting 1] 외부 USDZ 맵 로드 시 로봇 추락 해결</a:t>
             </a:r>
           </a:p>
         </p:txBody>
@@ -8895,23 +9124,23 @@
               </a:defRPr>
             </a:pPr>
             <a:r>
-              <a:t>**문제 상황**: 외부에서 제작된 실내 USDZ 맵을 로드했을 때, 메시 구조물은 눈에 보이나 물리적인 충돌 API가 없어 로봇이 중력에 의해 바닥을 뚫고 끝없이 추락함.</a:t>
-            </a:r>
-          </a:p>
-          <a:p>
-            <a:pPr lvl="1">
-              <a:spcAft>
-                <a:spcPts val="1000"/>
-              </a:spcAft>
-              <a:defRPr sz="1500">
-                <a:solidFill>
-                  <a:srgbClr val="B4B4B9"/>
-                </a:solidFill>
-                <a:latin typeface="맑은 고딕"/>
-              </a:defRPr>
-            </a:pPr>
-            <a:r>
-              <a:t>**해결책**: `env/environment.py` 파일의 `apply_map_collisions` 파트를 수정하여, 로드 시 맵 내부의 모든 하위 메시 노드들을 순회 탐색하고, 런타임에 UsdPhysics 물리 API를 강제 부여하여 견고한 바닥 충돌 경계면을 자동 생성하도록 조치.</a:t>
+              <a:t>**문제 상황**: 외부에서 제작된 USDZ 실내 맵을 불러왔을 때, 시각적으로만 보일 뿐 바닥의 물리 충돌 속성이 누락되어 스폰 즉시 로봇들이 낙하하는 심각한 현상 발생</a:t>
+            </a:r>
+          </a:p>
+          <a:p>
+            <a:pPr lvl="1">
+              <a:spcAft>
+                <a:spcPts val="1000"/>
+              </a:spcAft>
+              <a:defRPr sz="1500">
+                <a:solidFill>
+                  <a:srgbClr val="B4B4B9"/>
+                </a:solidFill>
+                <a:latin typeface="맑은 고딕"/>
+              </a:defRPr>
+            </a:pPr>
+            <a:r>
+              <a:t>**해결책**: `env/environment.py` 내의 `apply_map_collisions` 함수를 수정하여, 로드 시점에 모든 하위 메시를 자동 탐색하여 런타임에 UsdPhysics 물리 API를 강제 적용 및 충돌 경계 생성 완료</a:t>
             </a:r>
           </a:p>
         </p:txBody>
@@ -8973,7 +9202,7 @@
               </a:defRPr>
             </a:pPr>
             <a:r>
-              <a:t>Slide 25: [Troubleshooting 3-1] Nav2 코스트맵 튜닝: 장애물 통과 불능</a:t>
+              <a:t>Slide 25: [Troubleshooting 3-3] 맵 좌표계 및 Lidar TF 정밀 정렬</a:t>
             </a:r>
           </a:p>
         </p:txBody>
@@ -9012,23 +9241,23 @@
               </a:defRPr>
             </a:pPr>
             <a:r>
-              <a:t>**문제 상황**: 좁은 복도 코너나 가구 사이를 통과할 때, 기본 Inflation Radius 설정이 너무 크게 설정되어 로봇 주위의 모든 구역이 진입 불가 영역(Lethal Obstacle)으로 팽창되어 자율 주행 경로 생성이 원천 불가능해지는 데드락 발생.</a:t>
-            </a:r>
-          </a:p>
-          <a:p>
-            <a:pPr lvl="1">
-              <a:spcAft>
-                <a:spcPts val="1000"/>
-              </a:spcAft>
-              <a:defRPr sz="1500">
-                <a:solidFill>
-                  <a:srgbClr val="B4B4B9"/>
-                </a:solidFill>
-                <a:latin typeface="맑은 고딕"/>
-              </a:defRPr>
-            </a:pPr>
-            <a:r>
-              <a:t>**해결책**: `robot1_nav2_params.yaml` 및 `robot2_nav2_params.yaml` 내의 Costmap Inflation Layer의 `inflation_radius`와 `cost_scaling_factor` 파라미터를 실내 폭(최소 0.8m 통과 가능 규격)에 맞추어 보정하여 주행 성능 정상화.</a:t>
+              <a:t>**문제 상황**: 시뮬레이션 절대 원점과 ROS 2 내에서 Nav2가 맵(Map) 프레임을 투영할 때 사용하는 로컬 원점 간의 미세 각도 및 Lidar TF 오프셋 오차로 인해, 주행 중 로봇이 미끄러지고 벽에 충돌하는 누적 오차 발생</a:t>
+            </a:r>
+          </a:p>
+          <a:p>
+            <a:pPr lvl="1">
+              <a:spcAft>
+                <a:spcPts val="1000"/>
+              </a:spcAft>
+              <a:defRPr sz="1500">
+                <a:solidFill>
+                  <a:srgbClr val="B4B4B9"/>
+                </a:solidFill>
+                <a:latin typeface="맑은 고딕"/>
+              </a:defRPr>
+            </a:pPr>
+            <a:r>
+              <a:t>**해결책**: 브릿지 스크립트 `pose_file_to_ros_bridge.py` 단에서 회전 쿼터니언 오프셋 역보정 필터를 연산에 탑재하여 오도메트리 좌표 동기화 오차 0% 실현</a:t>
             </a:r>
           </a:p>
         </p:txBody>
@@ -9090,7 +9319,7 @@
               </a:defRPr>
             </a:pPr>
             <a:r>
-              <a:t>Slide 26: [Troubleshooting 3-3] 맵 좌표계 불일치 (Lidar TF 오차 수정)</a:t>
+              <a:t>Slide 26: Stage 2: 에이전트 임무 분담 및 자율 주행 이동</a:t>
             </a:r>
           </a:p>
         </p:txBody>
@@ -9129,23 +9358,23 @@
               </a:defRPr>
             </a:pPr>
             <a:r>
-              <a:t>**문제 상황**: 시뮬레이션 상의 로봇의 글로벌 좌표 좌표계 기준과 ROS 2 내에서 Nav2가 맵(Map) 프레임을 생성할 때 사용하는 로컬 원점 간의 미세한 회전 오프셋 및 Lidar 조준축 불일치로 인하여, 주행할수록 맵이 찢어지고 로봇이 벽에 충돌함.</a:t>
-            </a:r>
-          </a:p>
-          <a:p>
-            <a:pPr lvl="1">
-              <a:spcAft>
-                <a:spcPts val="1000"/>
-              </a:spcAft>
-              <a:defRPr sz="1500">
-                <a:solidFill>
-                  <a:srgbClr val="B4B4B9"/>
-                </a:solidFill>
-                <a:latin typeface="맑은 고딕"/>
-              </a:defRPr>
-            </a:pPr>
-            <a:r>
-              <a:t>**해결책**: Lidar 마운트 각도 오프셋 값을 역계산하여 브릿지 노드 `pose_file_to_ros_bridge.py` 상에서 강제로 Quaternion 좌표 축 보정 필터를 보태고, 로봇 오도메트리 파라미터를 보정하여 좌표 동기화 오차율 0% 달성.</a:t>
+              <a:t>**자율 주행 분업 단계**: 로봇 2대가 독립적으로 목적지까지 회피 주행</a:t>
+            </a:r>
+          </a:p>
+          <a:p>
+            <a:pPr lvl="1">
+              <a:spcAft>
+                <a:spcPts val="1000"/>
+              </a:spcAft>
+              <a:defRPr sz="1500">
+                <a:solidFill>
+                  <a:srgbClr val="B4B4B9"/>
+                </a:solidFill>
+                <a:latin typeface="맑은 고딕"/>
+              </a:defRPr>
+            </a:pPr>
+            <a:r>
+              <a:t>**동작 분담**: robot1은 소화기가 위치한 방으로, robot2는 실내 5개 방 순환 감시 순찰 전개</a:t>
             </a:r>
           </a:p>
         </p:txBody>
@@ -9207,7 +9436,7 @@
               </a:defRPr>
             </a:pPr>
             <a:r>
-              <a:t>Slide 27: [Troubleshooting 4] Nav2 자율 이동 시 급격한 회전 및 모션 제어</a:t>
+              <a:t>Slide 27: Stage 2 주요 기능: robot1 소화기방 주행</a:t>
             </a:r>
           </a:p>
         </p:txBody>
@@ -9246,23 +9475,23 @@
               </a:defRPr>
             </a:pPr>
             <a:r>
-              <a:t>**문제 상황**: 자율 주행 중 ROS 2 내비게이터가 인가하는 회전 속도 명령이 급작스럽게 바뀔 때마다, 물리 엔진 내의 사족보행 로봇 관절이 이를 추종하지 못해 급회전하거나 휘청거리며 다리 링크가 손상되는 모션 불안정 현상 발생.</a:t>
-            </a:r>
-          </a:p>
-          <a:p>
-            <a:pPr lvl="1">
-              <a:spcAft>
-                <a:spcPts val="1000"/>
-              </a:spcAft>
-              <a:defRPr sz="1500">
-                <a:solidFill>
-                  <a:srgbClr val="B4B4B9"/>
-                </a:solidFill>
-                <a:latin typeface="맑은 고딕"/>
-              </a:defRPr>
-            </a:pPr>
-            <a:r>
-              <a:t>**해결책**: `applications/spot_agent.py` 내의 `_stable_drive_command` 함수를 추가 설계하여, 과거 명령 프레임과 현재 프레임의 입력 가속 비율을 조절하는 Low-pass filter 및 급격한 속도 변화를 억제하는 Slew-rate limiter 로직을 탑재하여 모션 스무딩 달성.</a:t>
+              <a:t>**자율 목적지 쿼리**: ROS 2 Action 기반 `NavigateToPose` 호출</a:t>
+            </a:r>
+          </a:p>
+          <a:p>
+            <a:pPr lvl="1">
+              <a:spcAft>
+                <a:spcPts val="1000"/>
+              </a:spcAft>
+              <a:defRPr sz="1500">
+                <a:solidFill>
+                  <a:srgbClr val="B4B4B9"/>
+                </a:solidFill>
+                <a:latin typeface="맑은 고딕"/>
+              </a:defRPr>
+            </a:pPr>
+            <a:r>
+              <a:t>**실시간 동적 조향**: 사족보행 로봇의 전진/회전 명령을 속도 벡터로 해석하여 실시간 장애물 회피 주행 수행</a:t>
             </a:r>
           </a:p>
         </p:txBody>
@@ -9324,7 +9553,7 @@
               </a:defRPr>
             </a:pPr>
             <a:r>
-              <a:t>Slide 28: Stage 2: 화재 발생 및 매니퓰레이터 파지/투척 파이프라인</a:t>
+              <a:t>Slide 28: Stage 2 주요 기능: robot2 순방향 자율 순찰</a:t>
             </a:r>
           </a:p>
         </p:txBody>
@@ -9363,23 +9592,23 @@
               </a:defRPr>
             </a:pPr>
             <a:r>
-              <a:t>**동작 단계**: 물리 반응형 화재 확산 시뮬레이션 및 로봇 팔 조작성 테스트</a:t>
-            </a:r>
-          </a:p>
-          <a:p>
-            <a:pPr lvl="1">
-              <a:spcAft>
-                <a:spcPts val="1000"/>
-              </a:spcAft>
-              <a:defRPr sz="1500">
-                <a:solidFill>
-                  <a:srgbClr val="B4B4B9"/>
-                </a:solidFill>
-                <a:latin typeface="맑은 고딕"/>
-              </a:defRPr>
-            </a:pPr>
-            <a:r>
-              <a:t>**목표**: RL 관절 정책 오버라이드를 통한 소화기 픽앤플레이스 수동 인터페이스 검증</a:t>
+              <a:t>**순환 순찰 루프**: `[5 ➔ 1 ➔ 3 ➔ 4 ➔ 6번방]` 순방향 경로 설계</a:t>
+            </a:r>
+          </a:p>
+          <a:p>
+            <a:pPr lvl="1">
+              <a:spcAft>
+                <a:spcPts val="1000"/>
+              </a:spcAft>
+              <a:defRPr sz="1500">
+                <a:solidFill>
+                  <a:srgbClr val="B4B4B9"/>
+                </a:solidFill>
+                <a:latin typeface="맑은 고딕"/>
+              </a:defRPr>
+            </a:pPr>
+            <a:r>
+              <a:t>**사각지대 소거**: 방 진입 성공 시 `NavigateToPose`를 잠시 정지하고 `Spin` 액션 서버를 통해 360도 회전하여 인명 탐색 사각지대 차단</a:t>
             </a:r>
           </a:p>
         </p:txBody>
@@ -9441,7 +9670,7 @@
               </a:defRPr>
             </a:pPr>
             <a:r>
-              <a:t>Slide 29: Stage 2 주요 기능: 물리 기반 화재 시뮬레이션</a:t>
+              <a:t>Slide 29: [Troubleshooting 3-1] 좁은 문틈 통과 데드락 극복</a:t>
             </a:r>
           </a:p>
         </p:txBody>
@@ -9480,23 +9709,23 @@
               </a:defRPr>
             </a:pPr>
             <a:r>
-              <a:t>**동적 화재 파티클 생성**: OmniGraph 파티클 이미터를 활용하여 실감나는 연기 및 화염 비주얼 구현</a:t>
-            </a:r>
-          </a:p>
-          <a:p>
-            <a:pPr lvl="1">
-              <a:spcAft>
-                <a:spcPts val="1000"/>
-              </a:spcAft>
-              <a:defRPr sz="1500">
-                <a:solidFill>
-                  <a:srgbClr val="B4B4B9"/>
-                </a:solidFill>
-                <a:latin typeface="맑은 고딕"/>
-              </a:defRPr>
-            </a:pPr>
-            <a:r>
-              <a:t>**화재 확산 알고리즘**: 일정 주기에 따라 이미터 크기와 농도를 선형 증가시켜 불이 번지는 상황 연출</a:t>
+              <a:t>**문제 상황**: 기본 설정된 Inflation Radius가 너무 커 좁은 방 문틀이나 코너를 돌 때 코스트맵 전체가 통행 금지 구역으로 채워져 경로 생성이 불가능해져 제자리에서 멈추는 에러</a:t>
+            </a:r>
+          </a:p>
+          <a:p>
+            <a:pPr lvl="1">
+              <a:spcAft>
+                <a:spcPts val="1000"/>
+              </a:spcAft>
+              <a:defRPr sz="1500">
+                <a:solidFill>
+                  <a:srgbClr val="B4B4B9"/>
+                </a:solidFill>
+                <a:latin typeface="맑은 고딕"/>
+              </a:defRPr>
+            </a:pPr>
+            <a:r>
+              <a:t>**해결책**: `robot1_nav2_params.yaml` 및 `robot2_nav2_params.yaml` 파일 내의 `inflation_radius`와 `cost_scaling_factor` 변수를 실내 문폭(0.8m)에 알맞도록 슬림하게 하향 조정하여 주행 복구</a:t>
             </a:r>
           </a:p>
         </p:txBody>
@@ -9645,7 +9874,7 @@
               </a:defRPr>
             </a:pPr>
             <a:r>
-              <a:t>4.  **Implementation &amp; Troubleshooting**: 각 단계별 구현 결과 및 트러블슈팅 (Stage 1 ~ 5)</a:t>
+              <a:t>4.  **Implementation &amp; Troubleshooting**: run_stage5.sh 런타임 단계별 상세 결과 (Stage 1 ~ 5)</a:t>
             </a:r>
           </a:p>
           <a:p>
@@ -9723,7 +9952,7 @@
               </a:defRPr>
             </a:pPr>
             <a:r>
-              <a:t>Slide 30: Stage 2 주요 기능: 로봇 매니퓰레이터 제어</a:t>
+              <a:t>Slide 30: [Troubleshooting 4] 자율 이동 시 사족보행 모션 진동 억제</a:t>
             </a:r>
           </a:p>
         </p:txBody>
@@ -9762,23 +9991,23 @@
               </a:defRPr>
             </a:pPr>
             <a:r>
-              <a:t>**파지 (Grasp - G key)**: 로봇 그리퍼 끝단(End-effector)이 소화기 바운딩 영역에 닿으면 강한 관절 강성을 가해 고정시킴</a:t>
-            </a:r>
-          </a:p>
-          <a:p>
-            <a:pPr lvl="1">
-              <a:spcAft>
-                <a:spcPts val="1000"/>
-              </a:spcAft>
-              <a:defRPr sz="1500">
-                <a:solidFill>
-                  <a:srgbClr val="B4B4B9"/>
-                </a:solidFill>
-                <a:latin typeface="맑은 고딕"/>
-              </a:defRPr>
-            </a:pPr>
-            <a:r>
-              <a:t>**투척 (Throw - Q key)**: 매니퓰레이터의 어깨 및 팔꿈치 관절 모터를 전방으로 급속 스윙하면서 순간적으로 파지 동적 관계를 해제(Release)하여 물리 투사체 궤적 생성</a:t>
+              <a:t>**문제 상황**: Nav2의 급격한 회전 및 경로 수정 지시가 입력될 때, 시뮬레이터 속 Spot의 강화학습 보행 관절 제어가 이를 따라가지 못하고 심하게 기우뚱거리거나 미끄러져 다리 관절 모터가 파손되는 제어 흔들림 현상 발생</a:t>
+            </a:r>
+          </a:p>
+          <a:p>
+            <a:pPr lvl="1">
+              <a:spcAft>
+                <a:spcPts val="1000"/>
+              </a:spcAft>
+              <a:defRPr sz="1500">
+                <a:solidFill>
+                  <a:srgbClr val="B4B4B9"/>
+                </a:solidFill>
+                <a:latin typeface="맑은 고딕"/>
+              </a:defRPr>
+            </a:pPr>
+            <a:r>
+              <a:t>**해결책**: `applications/spot_agent.py` 내에 `_stable_drive_command` 함수를 이식하여 속도 가속도 한계를 억제하는 저역통과필터(LPF)로 제어파 보간 적용</a:t>
             </a:r>
           </a:p>
         </p:txBody>
@@ -9840,7 +10069,7 @@
               </a:defRPr>
             </a:pPr>
             <a:r>
-              <a:t>Slide 31: [Troubleshooting 2] 로봇 팔 전방 구동 시 무게 중심 불균형 전복</a:t>
+              <a:t>Slide 31: Stage 3: 소화기 자동 파지 및 투척 진압</a:t>
             </a:r>
           </a:p>
         </p:txBody>
@@ -9879,23 +10108,23 @@
               </a:defRPr>
             </a:pPr>
             <a:r>
-              <a:t>**문제 상황**: 소화기(무게 4.5kg 상당)를 잡기 위해 6축 로봇 팔을 전방으로 완전히 뻗었을 때, 무게 중심(CoG)이 앞발 너머로 이탈하면서 강화학습 보행 정책이 이를 험지 경사로 인식해 발을 헛디뎌 앞으로 완전히 꼬꾸라져 자빠지는 전복 에러 발생.</a:t>
-            </a:r>
-          </a:p>
-          <a:p>
-            <a:pPr lvl="1">
-              <a:spcAft>
-                <a:spcPts val="1000"/>
-              </a:spcAft>
-              <a:defRPr sz="1500">
-                <a:solidFill>
-                  <a:srgbClr val="B4B4B9"/>
-                </a:solidFill>
-                <a:latin typeface="맑은 고딕"/>
-              </a:defRPr>
-            </a:pPr>
-            <a:r>
-              <a:t>**해결책**: 파지 모드 진입 시 다리 관절 강성(Stiffness)을 2000으로 잠금(`override_leg_freeze`) 조치하여 기저부 하체를 완전히 단단한 삼각대 형태로 고정하고, 팔 관절 강성을 최대 `5000 / 250`으로 긴급 급상승(Boosting)시켜 전방 모멘트를 완벽히 지지하도록 튜닝 완료.</a:t>
+              <a:t>**특수 임무 단계**: 정밀 기하학 궤적 제어 및 소화 물질 낙하 조준</a:t>
+            </a:r>
+          </a:p>
+          <a:p>
+            <a:pPr lvl="1">
+              <a:spcAft>
+                <a:spcPts val="1000"/>
+              </a:spcAft>
+              <a:defRPr sz="1500">
+                <a:solidFill>
+                  <a:srgbClr val="B4B4B9"/>
+                </a:solidFill>
+                <a:latin typeface="맑은 고딕"/>
+              </a:defRPr>
+            </a:pPr>
+            <a:r>
+              <a:t>**동작 시퀀스**: 그립 강성 보강 ➔ 소화기 파지 ➔ 화재 중심부 `(0.158, -4.084)` 근접 ➔ 급격한 팔 스윙 투척 ➔ 화재 완진</a:t>
             </a:r>
           </a:p>
         </p:txBody>
@@ -9957,7 +10186,7 @@
               </a:defRPr>
             </a:pPr>
             <a:r>
-              <a:t>Slide 32: [Troubleshooting 3-2] 목표 근접 시 과보정 및 제자리 폭주 제어</a:t>
+              <a:t>Slide 32: Stage 3 주요 기능: 소화기 Grasp 오버라이드</a:t>
             </a:r>
           </a:p>
         </p:txBody>
@@ -9996,23 +10225,23 @@
               </a:defRPr>
             </a:pPr>
             <a:r>
-              <a:t>**문제 상황**: 로봇이 소화기 파지 지점이나 화점 근처 목표 위치에 0.1m 이내로 인접했을 때, 미세한 잔여 오차를 메우기 위해 지속적으로 고주파 각속도 명령을 인가하면서 제자리에서 발을 구르고 미친 듯이 회전하며 소화 대기 상태로 이행하지 못하는 폭주 현상 발생.</a:t>
-            </a:r>
-          </a:p>
-          <a:p>
-            <a:pPr lvl="1">
-              <a:spcAft>
-                <a:spcPts val="1000"/>
-              </a:spcAft>
-              <a:defRPr sz="1500">
-                <a:solidFill>
-                  <a:srgbClr val="B4B4B9"/>
-                </a:solidFill>
-                <a:latin typeface="맑은 고딕"/>
-              </a:defRPr>
-            </a:pPr>
-            <a:r>
-              <a:t>**해결책**: 에이전트 스크립트 내에 `idle_brake` 로직을 이식. 목표와 거리가 0.15m 이내에 진입하면 목표 주행 성공을 임의로 판정하고, 가상 브레이크 신호를 발생시켜 물리 모터 입력을 0으로 완전히 잠그고 즉시 다음 작업(파지/투척)을 호출하도록 시퀀스 보강.</a:t>
+              <a:t>**관절 강성 부스팅**: 파지 진입 순간 그리퍼 및 팔 조인트 강성(Stiffness)을 평소 대비 최대 `5000 / 250`으로 강제 격상</a:t>
+            </a:r>
+          </a:p>
+          <a:p>
+            <a:pPr lvl="1">
+              <a:spcAft>
+                <a:spcPts val="1000"/>
+              </a:spcAft>
+              <a:defRPr sz="1500">
+                <a:solidFill>
+                  <a:srgbClr val="B4B4B9"/>
+                </a:solidFill>
+                <a:latin typeface="맑은 고딕"/>
+              </a:defRPr>
+            </a:pPr>
+            <a:r>
+              <a:t>**하이브리드 상태 전환**: RL 보행 정책 통제 하에 있던 팔 조인트 각도를 Grasp 알고리즘 위치(`override_arm_angles`)로 강제 전환</a:t>
             </a:r>
           </a:p>
         </p:txBody>
@@ -10074,7 +10303,7 @@
               </a:defRPr>
             </a:pPr>
             <a:r>
-              <a:t>Slide 33: Stage 4: 인명 탐지 비전 카메라 및 YOLOv8 모델 연동</a:t>
+              <a:t>Slide 33: Stage 3 주요 기능: 소화기 투척 및 화재 완진</a:t>
             </a:r>
           </a:p>
         </p:txBody>
@@ -10113,23 +10342,23 @@
               </a:defRPr>
             </a:pPr>
             <a:r>
-              <a:t>**동작 단계**: 이미지 프로세싱과 인공지능 탐지 모듈 바인딩 단계</a:t>
-            </a:r>
-          </a:p>
-          <a:p>
-            <a:pPr lvl="1">
-              <a:spcAft>
-                <a:spcPts val="1000"/>
-              </a:spcAft>
-              <a:defRPr sz="1500">
-                <a:solidFill>
-                  <a:srgbClr val="B4B4B9"/>
-                </a:solidFill>
-                <a:latin typeface="맑은 고딕"/>
-              </a:defRPr>
-            </a:pPr>
-            <a:r>
-              <a:t>**목표**: RGB 카메라 프레임 상에서 사람 클래스를 탐지하고 정렬 각도를 계산하는 인공지능 제어 루프 확보</a:t>
+              <a:t>**자율 타겟팅 주행**: 소화기를 파지한 상태로 화점 앞 `(0.158, -4.084)` 좌표로 Nav2 경로 추종</a:t>
+            </a:r>
+          </a:p>
+          <a:p>
+            <a:pPr lvl="1">
+              <a:spcAft>
+                <a:spcPts val="1000"/>
+              </a:spcAft>
+              <a:defRPr sz="1500">
+                <a:solidFill>
+                  <a:srgbClr val="B4B4B9"/>
+                </a:solidFill>
+                <a:latin typeface="맑은 고딕"/>
+              </a:defRPr>
+            </a:pPr>
+            <a:r>
+              <a:t>**물리 투척 궤적**: 어깨 조인트를 전방 45도 방향으로 급속 가속한 뒤, 정점 프레임에서 파지 바인딩을 즉각 차단(Release)하여 낙하 궤적 생성</a:t>
             </a:r>
           </a:p>
         </p:txBody>
@@ -10191,7 +10420,7 @@
               </a:defRPr>
             </a:pPr>
             <a:r>
-              <a:t>Slide 34: Stage 4 주요 기능: 조난자 3D 에셋 모델링</a:t>
+              <a:t>Slide 34: [Troubleshooting 2] 소화기 파지 중 로봇 몸체 전도 방지</a:t>
             </a:r>
           </a:p>
         </p:txBody>
@@ -10230,23 +10459,23 @@
               </a:defRPr>
             </a:pPr>
             <a:r>
-              <a:t>**조난자 에셋 스폰**: `Person1`, `Person2` 등 리얼리스틱 캐릭터 물리 모델 배치</a:t>
-            </a:r>
-          </a:p>
-          <a:p>
-            <a:pPr lvl="1">
-              <a:spcAft>
-                <a:spcPts val="1000"/>
-              </a:spcAft>
-              <a:defRPr sz="1500">
-                <a:solidFill>
-                  <a:srgbClr val="B4B4B9"/>
-                </a:solidFill>
-                <a:latin typeface="맑은 고딕"/>
-              </a:defRPr>
-            </a:pPr>
-            <a:r>
-              <a:t>**동적 장애물화 해제**: 비행 주행 시에는 Nav2 맵에 장애물로 인식되게 하지만 에스코트 시에는 센서 융합을 위해 속성을 동적으로 온/오프할 수 있게 설계</a:t>
+              <a:t>**문제 상황**: Spot 로봇이 소화기를 잡기 위해 팔을 앞으로 길게 뻗을 때, 4.5kg에 달하는 소화기 하중으로 무게 중심(CoG)이 전방 지지 경계를 이탈하여 RL 보행 제어가 전복되는 사태 발생</a:t>
+            </a:r>
+          </a:p>
+          <a:p>
+            <a:pPr lvl="1">
+              <a:spcAft>
+                <a:spcPts val="1000"/>
+              </a:spcAft>
+              <a:defRPr sz="1500">
+                <a:solidFill>
+                  <a:srgbClr val="B4B4B9"/>
+                </a:solidFill>
+                <a:latin typeface="맑은 고딕"/>
+              </a:defRPr>
+            </a:pPr>
+            <a:r>
+              <a:t>**해결책**: 파지 시퀀스 트리거 즉시 다리 조인트의 Stiffness를 2000으로 세팅하여 하체를 단단히 잠그는 `override_leg_freeze` 루틴을 가동하여 물리 지지력 확보</a:t>
             </a:r>
           </a:p>
         </p:txBody>
@@ -10308,7 +10537,7 @@
               </a:defRPr>
             </a:pPr>
             <a:r>
-              <a:t>Slide 35: Stage 4 주요 기능: YOLOv8 실시간 인명 추적</a:t>
+              <a:t>Slide 35: [Troubleshooting 3-2] 목표 근처 제자리 맴돌기 폭주 현상 해결</a:t>
             </a:r>
           </a:p>
         </p:txBody>
@@ -10347,23 +10576,23 @@
               </a:defRPr>
             </a:pPr>
             <a:r>
-              <a:t>**추론 성능**: CPU-GPU 파이프라인 최적화를 통해 25ms 내외의 초고속 실시간 인퍼런스 실현</a:t>
-            </a:r>
-          </a:p>
-          <a:p>
-            <a:pPr lvl="1">
-              <a:spcAft>
-                <a:spcPts val="1000"/>
-              </a:spcAft>
-              <a:defRPr sz="1500">
-                <a:solidFill>
-                  <a:srgbClr val="B4B4B9"/>
-                </a:solidFill>
-                <a:latin typeface="맑은 고딕"/>
-              </a:defRPr>
-            </a:pPr>
-            <a:r>
-              <a:t>**정렬 피드백 제어**: 박스 중심이 화면 중앙에서 이탈한 픽셀 크기만큼 로봇 회전 각속도(`wz`)에 정비례하도록 비례제어(P-Control) 루프 설계</a:t>
+              <a:t>**문제 상황**: 소화기나 화점과 같은 정밀 구역에 0.1m 이내로 도달했을 때, 남은 미세 오차를 보정하려다 각속도 지시가 충돌하여 제자리에서 멈추지 않고 뱅글뱅글 맴도는 주행 루프 생성</a:t>
+            </a:r>
+          </a:p>
+          <a:p>
+            <a:pPr lvl="1">
+              <a:spcAft>
+                <a:spcPts val="1000"/>
+              </a:spcAft>
+              <a:defRPr sz="1500">
+                <a:solidFill>
+                  <a:srgbClr val="B4B4B9"/>
+                </a:solidFill>
+                <a:latin typeface="맑은 고딕"/>
+              </a:defRPr>
+            </a:pPr>
+            <a:r>
+              <a:t>**해결책**: 목표 0.15m 내 도달 시 자율 주행 태스크를 강제 성공 판정하고, 가상의 제동 장치(`idle_brake`)를 구동하여 제어 속도를 즉각 0으로 고정 후 팔 동작 명령으로 전환되도록 코드 조율</a:t>
             </a:r>
           </a:p>
         </p:txBody>
@@ -10425,7 +10654,7 @@
               </a:defRPr>
             </a:pPr>
             <a:r>
-              <a:t>Slide 36: [Troubleshooting 6] 일시적 비전 프레임 유실 및 깊이 버퍼 오류 해결</a:t>
+              <a:t>Slide 36: Stage 4: YOLOv8 인명 탐지 및 정렬/접근</a:t>
             </a:r>
           </a:p>
         </p:txBody>
@@ -10464,23 +10693,23 @@
               </a:defRPr>
             </a:pPr>
             <a:r>
-              <a:t>**문제 상황**: YOLOv8 탐지는 되었으나, 순간적인 센서 리셋이나 드롭으로 RGB-D 깊이 센서 데이터 버퍼(`depth_np[cy, cx]`)가 NaN(Not a Number) 혹은 0값으로 빈 데이터가 들어오는 경우, 거리 계산이 불가능하여 상태머신이 제자리에서 멈추어 서는 버그 발생.</a:t>
-            </a:r>
-          </a:p>
-          <a:p>
-            <a:pPr lvl="1">
-              <a:spcAft>
-                <a:spcPts val="1000"/>
-              </a:spcAft>
-              <a:defRPr sz="1500">
-                <a:solidFill>
-                  <a:srgbClr val="B4B4B9"/>
-                </a:solidFill>
-                <a:latin typeface="맑은 고딕"/>
-              </a:defRPr>
-            </a:pPr>
-            <a:r>
-              <a:t>**해결책**: 예외 포착 로직을 추가하여 깊이 맵이 깨지는 즉시 시뮬레이터 물리 코어의 레이저 가상 라인 캐스팅 함수인 `_camera_raycast_person_detection`을 Fallback(백업)으로 즉시 기동시켜 물리학적 거리를 실시간 우회 측정해 시퀀스를 논스톱 완수하도록 조치.</a:t>
+              <a:t>**인공지능 비전 정렬 단계**: YOLOv8 탐지와 P제어 조향 융합</a:t>
+            </a:r>
+          </a:p>
+          <a:p>
+            <a:pPr lvl="1">
+              <a:spcAft>
+                <a:spcPts val="1000"/>
+              </a:spcAft>
+              <a:defRPr sz="1500">
+                <a:solidFill>
+                  <a:srgbClr val="B4B4B9"/>
+                </a:solidFill>
+                <a:latin typeface="맑은 고딕"/>
+              </a:defRPr>
+            </a:pPr>
+            <a:r>
+              <a:t>**동작 시퀀스**: 순찰 자율 목표 즉시 캔슬 ➔ Heading Error 비례 각속도 인가 ➔ 정면 고정 후 전진 접근</a:t>
             </a:r>
           </a:p>
         </p:txBody>
@@ -10542,7 +10771,7 @@
               </a:defRPr>
             </a:pPr>
             <a:r>
-              <a:t>Slide 37: Stage 5: 완전 자동화 시나리오 통합 및 협동 주행 파이프라인</a:t>
+              <a:t>Slide 37: Stage 4 주요 기능: YOLOv8 실시간 인명 검출</a:t>
             </a:r>
           </a:p>
         </p:txBody>
@@ -10581,23 +10810,23 @@
               </a:defRPr>
             </a:pPr>
             <a:r>
-              <a:t>**동작 단계**: 전체 시스템의 최고 난이도 통합 런타임 단계</a:t>
-            </a:r>
-          </a:p>
-          <a:p>
-            <a:pPr lvl="1">
-              <a:spcAft>
-                <a:spcPts val="1000"/>
-              </a:spcAft>
-              <a:defRPr sz="1500">
-                <a:solidFill>
-                  <a:srgbClr val="B4B4B9"/>
-                </a:solidFill>
-                <a:latin typeface="맑은 고딕"/>
-              </a:defRPr>
-            </a:pPr>
-            <a:r>
-              <a:t>**목표**: 완전 무인 상태에서 두 에이전트의 충돌 없는 상호 분업 및 안전 탈출 성공</a:t>
+              <a:t>**경량 딥러닝 탑재**: `yolov8n.pt`를 ROS 2 노드에 연동하여 저지연(25ms) 실시간 연산 보장</a:t>
+            </a:r>
+          </a:p>
+          <a:p>
+            <a:pPr lvl="1">
+              <a:spcAft>
+                <a:spcPts val="1000"/>
+              </a:spcAft>
+              <a:defRPr sz="1500">
+                <a:solidFill>
+                  <a:srgbClr val="B4B4B9"/>
+                </a:solidFill>
+                <a:latin typeface="맑은 고딕"/>
+              </a:defRPr>
+            </a:pPr>
+            <a:r>
+              <a:t>**인식 역치 설정**: `COBOT_YOLO_CONF = 0.35`로 튜닝하여 룸 내부의 조난자를 확실히 필터링</a:t>
             </a:r>
           </a:p>
         </p:txBody>
@@ -10659,7 +10888,7 @@
               </a:defRPr>
             </a:pPr>
             <a:r>
-              <a:t>Slide 38: Stage 5 주요 기능: robot1 완전 자동 소화 시퀀스</a:t>
+              <a:t>Slide 38: Stage 4 주요 기능: 비전 비례제어 정렬 및 접근</a:t>
             </a:r>
           </a:p>
         </p:txBody>
@@ -10698,23 +10927,23 @@
               </a:defRPr>
             </a:pPr>
             <a:r>
-              <a:t>**목적지 자율 이행**: ROS 2 Action 인터페이스를 이용해 `소화기 위치` -&gt; `화점 위치` -&gt; `최종 대피소`로 순차적 자율 주행</a:t>
-            </a:r>
-          </a:p>
-          <a:p>
-            <a:pPr lvl="1">
-              <a:spcAft>
-                <a:spcPts val="1000"/>
-              </a:spcAft>
-              <a:defRPr sz="1500">
-                <a:solidFill>
-                  <a:srgbClr val="B4B4B9"/>
-                </a:solidFill>
-                <a:latin typeface="맑은 고딕"/>
-              </a:defRPr>
-            </a:pPr>
-            <a:r>
-              <a:t>**로봇 팔 상태 머신 결합**: 지정 주행 구역 반경 내에 들어오면 주행 상태를 일시 중단하고 파지/투척 매니퓰레이터 상태 머신을 트리거한 후 복귀하는 자동화 시퀀스</a:t>
+              <a:t>**각도 P 제어**: 바운딩 박스 오차 cx에 비례하여 제자리 회전 명령 인가</a:t>
+            </a:r>
+          </a:p>
+          <a:p>
+            <a:pPr lvl="1">
+              <a:spcAft>
+                <a:spcPts val="1000"/>
+              </a:spcAft>
+              <a:defRPr sz="1500">
+                <a:solidFill>
+                  <a:srgbClr val="B4B4B9"/>
+                </a:solidFill>
+                <a:latin typeface="맑은 고딕"/>
+              </a:defRPr>
+            </a:pPr>
+            <a:r>
+              <a:t>**정밀 정렬 및 진입**: 정렬각 오차 `heading_error &lt; 0.10 rad` 도달 시 직진 속도 인가 ➔ 목표 전방 1.15m 근방 안착</a:t>
             </a:r>
           </a:p>
         </p:txBody>
@@ -10776,7 +11005,7 @@
               </a:defRPr>
             </a:pPr>
             <a:r>
-              <a:t>Slide 39: Stage 5 주요 기능: robot2 순찰 및 조난자 호송 유도</a:t>
+              <a:t>Slide 39: [Troubleshooting 6] 비전 센서 유실 극복 Fallback 시스템 구축</a:t>
             </a:r>
           </a:p>
         </p:txBody>
@@ -10815,23 +11044,23 @@
               </a:defRPr>
             </a:pPr>
             <a:r>
-              <a:t>**순찰 루프**: `[5➔1➔3➔4➔6번방]` 순서로 Nav2 및 360도 Spin 명령을 반복하며 정밀 순찰</a:t>
-            </a:r>
-          </a:p>
-          <a:p>
-            <a:pPr lvl="1">
-              <a:spcAft>
-                <a:spcPts val="1000"/>
-              </a:spcAft>
-              <a:defRPr sz="1500">
-                <a:solidFill>
-                  <a:srgbClr val="B4B4B9"/>
-                </a:solidFill>
-                <a:latin typeface="맑은 고딕"/>
-              </a:defRPr>
-            </a:pPr>
-            <a:r>
-              <a:t>**대피 유도**: 인명 탐지 즉시 순찰 임무를 강제 취소하고, 조난자의 물리 충돌 속성을 차단 후 로봇 후방 2.4m 거리로 조난자를 동적 위치 업데이트하며 출구로 에스코트 자율 주행</a:t>
+              <a:t>**문제 상황**: YOLOv8로 사람은 감지했으나 센서 지연 등으로 인해 Depth Plane 데이터 수집이 지연되거나 NaN(Not a Number) 값이 쿼리되어 로봇이 멈추거나 코드가 뻗는 치명적 에러 발생</a:t>
+            </a:r>
+          </a:p>
+          <a:p>
+            <a:pPr lvl="1">
+              <a:spcAft>
+                <a:spcPts val="1000"/>
+              </a:spcAft>
+              <a:defRPr sz="1500">
+                <a:solidFill>
+                  <a:srgbClr val="B4B4B9"/>
+                </a:solidFill>
+                <a:latin typeface="맑은 고딕"/>
+              </a:defRPr>
+            </a:pPr>
+            <a:r>
+              <a:t>**해결책**: 거리 계산 에러 포착 즉시 시뮬레이터 물리 코어 단의 가상 레이캐스트 함수인 `_camera_raycast_person_detection`을 백업(Fallback)으로 호출하여 안정적으로 거리 갱신을 유지하도록 구조화</a:t>
             </a:r>
           </a:p>
         </p:txBody>
@@ -11026,7 +11255,7 @@
               </a:defRPr>
             </a:pPr>
             <a:r>
-              <a:t>Slide 40: [Troubleshooting 5] 통신 지연으로 인한 Nav2 액션 서버 먹통 해결</a:t>
+              <a:t>Slide 40: Stage 5: 에스코트 유도 및 출구 동시 안전 탈출</a:t>
             </a:r>
           </a:p>
         </p:txBody>
@@ -11065,23 +11294,23 @@
               </a:defRPr>
             </a:pPr>
             <a:r>
-              <a:t>**문제 상황**: 시뮬레이션 리소스 과부하로 인해 일시적인 DDS 네트워크 병목이 생겼을 때, ROS 2 Nav2 액션 서버가 완료 혹은 실패 응답(Goal Response)을 주지 않고 무한 대기 상태(Deadlock)에 빠져 로봇이 다음 방으로 가지 못하고 멈추는 에러.</a:t>
-            </a:r>
-          </a:p>
-          <a:p>
-            <a:pPr lvl="1">
-              <a:spcAft>
-                <a:spcPts val="1000"/>
-              </a:spcAft>
-              <a:defRPr sz="1500">
-                <a:solidFill>
-                  <a:srgbClr val="B4B4B9"/>
-                </a:solidFill>
-                <a:latin typeface="맑은 고딕"/>
-              </a:defRPr>
-            </a:pPr>
-            <a:r>
-              <a:t>**해결책**: `robot2_room_patrol.py` 내에 `_nav_goal_retry` 비동기 상태 확인 스레드를 설계. 목표 송신 후 일정 시간(예: 8초) 내에 상태 피드백이 응답되지 않으면, 활성 액션을 강제 캔슬하고 목표지를 다시 재전송하는 리트라이(Retry) 예외 감시 루틴을 추가하여 생존성 보장.</a:t>
+              <a:t>**최종 탈출 제어 단계**: 에스코트 통행 장애 해결 및 두 로봇의 출구 집결</a:t>
+            </a:r>
+          </a:p>
+          <a:p>
+            <a:pPr lvl="1">
+              <a:spcAft>
+                <a:spcPts val="1000"/>
+              </a:spcAft>
+              <a:defRPr sz="1500">
+                <a:solidFill>
+                  <a:srgbClr val="B4B4B9"/>
+                </a:solidFill>
+                <a:latin typeface="맑은 고딕"/>
+              </a:defRPr>
+            </a:pPr>
+            <a:r>
+              <a:t>**목표**: `EXIT_POS` `(1.568, 20.041)`로 동기 탈출 후 타임라인 Pause 자동화</a:t>
             </a:r>
           </a:p>
         </p:txBody>
@@ -11143,7 +11372,7 @@
               </a:defRPr>
             </a:pPr>
             <a:r>
-              <a:t>Slide 41: 프로젝트 시연: 통합 시나리오 구동 영상</a:t>
+              <a:t>Slide 41: Stage 5 주요 기능: 충돌체 해제 &amp; Costmap 리셋</a:t>
             </a:r>
           </a:p>
         </p:txBody>
@@ -11182,23 +11411,23 @@
               </a:defRPr>
             </a:pPr>
             <a:r>
-              <a:t>**진압 시나리오 (Stage 1~2)**: Isaac Sim 로봇 스폰 ➔ 수동/자율 주행 및 라이다 매핑 ➔ Spot 로봇 팔 제어 오버라이드 및 소화기 파지/투척 진압</a:t>
-            </a:r>
-          </a:p>
-          <a:p>
-            <a:pPr lvl="1">
-              <a:spcAft>
-                <a:spcPts val="1000"/>
-              </a:spcAft>
-              <a:defRPr sz="1500">
-                <a:solidFill>
-                  <a:srgbClr val="B4B4B9"/>
-                </a:solidFill>
-                <a:latin typeface="맑은 고딕"/>
-              </a:defRPr>
-            </a:pPr>
-            <a:r>
-              <a:t>**구조 시나리오 (Stage 4~5)**: YOLOv8 실시간 조난자 감지 ➔ 정렬 및 접근 ➔ 에스코트 유도(장애물 팽창 회피 및 Costmap 초기화) ➔ 출구 동시 안전 탈출 완료</a:t>
+              <a:t>**동적 콜리전 제거**: `_set_person2_collision_enabled(False)`를 통해 Lidar 스캔 광선 관통 처리</a:t>
+            </a:r>
+          </a:p>
+          <a:p>
+            <a:pPr lvl="1">
+              <a:spcAft>
+                <a:spcPts val="1000"/>
+              </a:spcAft>
+              <a:defRPr sz="1500">
+                <a:solidFill>
+                  <a:srgbClr val="B4B4B9"/>
+                </a:solidFill>
+                <a:latin typeface="맑은 고딕"/>
+              </a:defRPr>
+            </a:pPr>
+            <a:r>
+              <a:t>**코스트맵 강제 플러시**: `_clear_robot2_costmaps` 서비스 동적 호출을 통해 순간적으로 팽창된 cost를 삭제하여 자율 주행로 즉시 재개설</a:t>
             </a:r>
           </a:p>
         </p:txBody>
@@ -11260,7 +11489,7 @@
               </a:defRPr>
             </a:pPr>
             <a:r>
-              <a:t>Slide 42: 자체 평가의견: 기술적 개선점 및 향후 로드맵</a:t>
+              <a:t>Slide 42: Stage 5 주요 기능: 조난자 동반 탈출 및 시뮬레이션 일시정지</a:t>
             </a:r>
           </a:p>
         </p:txBody>
@@ -11299,135 +11528,23 @@
               </a:defRPr>
             </a:pPr>
             <a:r>
-              <a:t>**기술적 개선점 (Technical Improvements)**:</a:t>
-            </a:r>
-          </a:p>
-          <a:p>
-            <a:pPr lvl="1">
-              <a:spcAft>
-                <a:spcPts val="1000"/>
-              </a:spcAft>
-              <a:defRPr sz="1500">
-                <a:solidFill>
-                  <a:srgbClr val="B4B4B9"/>
-                </a:solidFill>
-                <a:latin typeface="맑은 고딕"/>
-              </a:defRPr>
-            </a:pPr>
-            <a:r>
-              <a:t>*물리 마찰*: 소화기 릴리즈 시 그리퍼 잔여 마찰력을 zero로 동적 API 변환하여 투척 정확도 보장 필요</a:t>
-            </a:r>
-          </a:p>
-          <a:p>
-            <a:pPr lvl="1">
-              <a:spcAft>
-                <a:spcPts val="1000"/>
-              </a:spcAft>
-              <a:defRPr sz="1500">
-                <a:solidFill>
-                  <a:srgbClr val="B4B4B9"/>
-                </a:solidFill>
-                <a:latin typeface="맑은 고딕"/>
-              </a:defRPr>
-            </a:pPr>
-            <a:r>
-              <a:t>*라이다 간섭*: 화염 연기 파티클의 센서 난반사 오차를 제거하기 위한 Kalman Filter 통신 보완</a:t>
-            </a:r>
-          </a:p>
-          <a:p>
-            <a:pPr lvl="1">
-              <a:spcAft>
-                <a:spcPts val="1000"/>
-              </a:spcAft>
-              <a:defRPr sz="1500">
-                <a:solidFill>
-                  <a:srgbClr val="B4B4B9"/>
-                </a:solidFill>
-                <a:latin typeface="맑은 고딕"/>
-              </a:defRPr>
-            </a:pPr>
-            <a:r>
-              <a:t>*질량 적응 RL*: 중량물 파지 보행 시 도메인 랜더마이징(Domain Randomization)을 반영한 하이퍼 파라미터 재학습</a:t>
-            </a:r>
-          </a:p>
-          <a:p>
-            <a:pPr lvl="1">
-              <a:spcAft>
-                <a:spcPts val="1000"/>
-              </a:spcAft>
-              <a:defRPr sz="1500">
-                <a:solidFill>
-                  <a:srgbClr val="B4B4B9"/>
-                </a:solidFill>
-                <a:latin typeface="맑은 고딕"/>
-              </a:defRPr>
-            </a:pPr>
-            <a:r>
-              <a:t>*동기화*: 시뮬레이터-ROS2 간 비동기 레이턴시 방지를 위해 Real-Time 커널 및 HIL 도입 검토</a:t>
-            </a:r>
-          </a:p>
-          <a:p>
-            <a:pPr lvl="1">
-              <a:spcAft>
-                <a:spcPts val="1000"/>
-              </a:spcAft>
-              <a:defRPr sz="1500">
-                <a:solidFill>
-                  <a:srgbClr val="B4B4B9"/>
-                </a:solidFill>
-                <a:latin typeface="맑은 고딕"/>
-              </a:defRPr>
-            </a:pPr>
-            <a:r>
-              <a:t>**차후 발전 방향 (Future Roadmap)**:</a:t>
-            </a:r>
-          </a:p>
-          <a:p>
-            <a:pPr lvl="1">
-              <a:spcAft>
-                <a:spcPts val="1000"/>
-              </a:spcAft>
-              <a:defRPr sz="1500">
-                <a:solidFill>
-                  <a:srgbClr val="B4B4B9"/>
-                </a:solidFill>
-                <a:latin typeface="맑은 고딕"/>
-              </a:defRPr>
-            </a:pPr>
-            <a:r>
-              <a:t>*1단계 Sim-to-Real*: 검증된 Nav2 및 YOLOv8 가중치를 실물 사족보행 로봇(Spot)에 포팅 및 실물 실증</a:t>
-            </a:r>
-          </a:p>
-          <a:p>
-            <a:pPr lvl="1">
-              <a:spcAft>
-                <a:spcPts val="1000"/>
-              </a:spcAft>
-              <a:defRPr sz="1500">
-                <a:solidFill>
-                  <a:srgbClr val="B4B4B9"/>
-                </a:solidFill>
-                <a:latin typeface="맑은 고딕"/>
-              </a:defRPr>
-            </a:pPr>
-            <a:r>
-              <a:t>*2단계 MARL*: 고정 룰 기반 분업에서 다중 협동 강화학습 기반의 지능형 역할 동적 배분</a:t>
-            </a:r>
-          </a:p>
-          <a:p>
-            <a:pPr lvl="1">
-              <a:spcAft>
-                <a:spcPts val="1000"/>
-              </a:spcAft>
-              <a:defRPr sz="1500">
-                <a:solidFill>
-                  <a:srgbClr val="B4B4B9"/>
-                </a:solidFill>
-                <a:latin typeface="맑은 고딕"/>
-              </a:defRPr>
-            </a:pPr>
-            <a:r>
-              <a:t>*3단계 클라우드*: 5G 기반 중앙 재난 상황 관제 대시보드 연동 시각화</a:t>
+              <a:t>**후방 트래킹 유도**: `_follow_person2_behind_robot`을 돌려 조난자를 로봇 이동 궤적 후방 2.4m 지점에 지속 위치 갱신</a:t>
+            </a:r>
+          </a:p>
+          <a:p>
+            <a:pPr lvl="1">
+              <a:spcAft>
+                <a:spcPts val="1000"/>
+              </a:spcAft>
+              <a:defRPr sz="1500">
+                <a:solidFill>
+                  <a:srgbClr val="B4B4B9"/>
+                </a:solidFill>
+                <a:latin typeface="맑은 고딕"/>
+              </a:defRPr>
+            </a:pPr>
+            <a:r>
+              <a:t>**임무 완료 인터셉터**: 탈출 거리 임계치 이내 진입 시 속도 0 및 타임라인 자동 Pause 트리거</a:t>
             </a:r>
           </a:p>
         </p:txBody>
@@ -11489,7 +11606,7 @@
               </a:defRPr>
             </a:pPr>
             <a:r>
-              <a:t>Slide 43: 자체 평가의견: 성과 및 한계 (Well-Done &amp; Limitations)</a:t>
+              <a:t>Slide 43: [Troubleshooting 5] 통신 지연에 따른 Nav2 액션 캔슬/재전송 루틴</a:t>
             </a:r>
           </a:p>
         </p:txBody>
@@ -11528,119 +11645,23 @@
               </a:defRPr>
             </a:pPr>
             <a:r>
-              <a:t>**Well-Done (잘한 점)**:</a:t>
-            </a:r>
-          </a:p>
-          <a:p>
-            <a:pPr lvl="1">
-              <a:spcAft>
-                <a:spcPts val="1000"/>
-              </a:spcAft>
-              <a:defRPr sz="1500">
-                <a:solidFill>
-                  <a:srgbClr val="B4B4B9"/>
-                </a:solidFill>
-                <a:latin typeface="맑은 고딕"/>
-              </a:defRPr>
-            </a:pPr>
-            <a:r>
-              <a:t>*완전 자동화*: 인간의 개입을 배제한 로봇 2대의 시나리오 100% 자율 완수</a:t>
-            </a:r>
-          </a:p>
-          <a:p>
-            <a:pPr lvl="1">
-              <a:spcAft>
-                <a:spcPts val="1000"/>
-              </a:spcAft>
-              <a:defRPr sz="1500">
-                <a:solidFill>
-                  <a:srgbClr val="B4B4B9"/>
-                </a:solidFill>
-                <a:latin typeface="맑은 고딕"/>
-              </a:defRPr>
-            </a:pPr>
-            <a:r>
-              <a:t>*결함 돌파*: DDS 병목, RL 전복, 좌표 오차 등 8대 난제를 코딩으로 극복</a:t>
-            </a:r>
-          </a:p>
-          <a:p>
-            <a:pPr lvl="1">
-              <a:spcAft>
-                <a:spcPts val="1000"/>
-              </a:spcAft>
-              <a:defRPr sz="1500">
-                <a:solidFill>
-                  <a:srgbClr val="B4B4B9"/>
-                </a:solidFill>
-                <a:latin typeface="맑은 고딕"/>
-              </a:defRPr>
-            </a:pPr>
-            <a:r>
-              <a:t>*문서화 기여*: 시스템 아키텍처 및 상세 설계를 8대 Mermaid 다이어그램으로 완비</a:t>
-            </a:r>
-          </a:p>
-          <a:p>
-            <a:pPr lvl="1">
-              <a:spcAft>
-                <a:spcPts val="1000"/>
-              </a:spcAft>
-              <a:defRPr sz="1500">
-                <a:solidFill>
-                  <a:srgbClr val="B4B4B9"/>
-                </a:solidFill>
-                <a:latin typeface="맑은 고딕"/>
-              </a:defRPr>
-            </a:pPr>
-            <a:r>
-              <a:t>**Limitations (아쉬웠던 점)**:</a:t>
-            </a:r>
-          </a:p>
-          <a:p>
-            <a:pPr lvl="1">
-              <a:spcAft>
-                <a:spcPts val="1000"/>
-              </a:spcAft>
-              <a:defRPr sz="1500">
-                <a:solidFill>
-                  <a:srgbClr val="B4B4B9"/>
-                </a:solidFill>
-                <a:latin typeface="맑은 고딕"/>
-              </a:defRPr>
-            </a:pPr>
-            <a:r>
-              <a:t>*상태 진단 누락*: 조난자 단순 식별 외 화상/의식 여부 등 정밀 진료(Triage) 부재</a:t>
-            </a:r>
-          </a:p>
-          <a:p>
-            <a:pPr lvl="1">
-              <a:spcAft>
-                <a:spcPts val="1000"/>
-              </a:spcAft>
-              <a:defRPr sz="1500">
-                <a:solidFill>
-                  <a:srgbClr val="B4B4B9"/>
-                </a:solidFill>
-                <a:latin typeface="맑은 고딕"/>
-              </a:defRPr>
-            </a:pPr>
-            <a:r>
-              <a:t>*동적 경로 지연*: 화재 확산 점을 실시간 장애물 맵핑하는 연산 속도의 소폭 저하</a:t>
-            </a:r>
-          </a:p>
-          <a:p>
-            <a:pPr lvl="1">
-              <a:spcAft>
-                <a:spcPts val="1000"/>
-              </a:spcAft>
-              <a:defRPr sz="1500">
-                <a:solidFill>
-                  <a:srgbClr val="B4B4B9"/>
-                </a:solidFill>
-                <a:latin typeface="맑은 고딕"/>
-              </a:defRPr>
-            </a:pPr>
-            <a:r>
-              <a:t>*단일 의존성*: 소화기 스폰 개수가 1개여서 투척 실패 시 대안이 없는 단일 실패점</a:t>
+              <a:t>**문제 상황**: 3D 그래픽 파티클과 대용량 통신망이 동시에 도는 통합 런타임에서 순간 병목으로 Nav2 Goal Response가 유실되면 액션이 대기 상태(Deadlock)에 걸려 로봇 주행 중지</a:t>
+            </a:r>
+          </a:p>
+          <a:p>
+            <a:pPr lvl="1">
+              <a:spcAft>
+                <a:spcPts val="1000"/>
+              </a:spcAft>
+              <a:defRPr sz="1500">
+                <a:solidFill>
+                  <a:srgbClr val="B4B4B9"/>
+                </a:solidFill>
+                <a:latin typeface="맑은 고딕"/>
+              </a:defRPr>
+            </a:pPr>
+            <a:r>
+              <a:t>**해결책**: `robot2_room_patrol.py`에 `_nav_goal_retry` 비동기 상태 체크 스레드를 구성. 8초간 완료 상태 피드백이 오지 않을 경우 기존 액션을 강제 취소 후 재전송하여 생존성 확보</a:t>
             </a:r>
           </a:p>
         </p:txBody>
@@ -11702,7 +11723,566 @@
               </a:defRPr>
             </a:pPr>
             <a:r>
-              <a:t>Slide 44: Q &amp; A</a:t>
+              <a:t>Slide 44: 프로젝트 시연: 통합 시나리오 구동 영상</a:t>
+            </a:r>
+          </a:p>
+        </p:txBody>
+      </p:sp>
+      <p:sp>
+        <p:nvSpPr>
+          <p:cNvPr id="3" name="TextBox 2"/>
+          <p:cNvSpPr txBox="1"/>
+          <p:nvPr/>
+        </p:nvSpPr>
+        <p:spPr>
+          <a:xfrm>
+            <a:off x="914400" y="2011680"/>
+            <a:ext cx="10362895" cy="4114800"/>
+          </a:xfrm>
+          <a:prstGeom prst="rect">
+            <a:avLst/>
+          </a:prstGeom>
+          <a:noFill/>
+        </p:spPr>
+        <p:txBody>
+          <a:bodyPr wrap="square" lIns="0" tIns="0" rIns="0" bIns="0">
+            <a:spAutoFit/>
+          </a:bodyPr>
+          <a:lstStyle/>
+          <a:p>
+            <a:pPr lvl="1">
+              <a:spcAft>
+                <a:spcPts val="1000"/>
+              </a:spcAft>
+              <a:defRPr sz="1500">
+                <a:solidFill>
+                  <a:srgbClr val="B4B4B9"/>
+                </a:solidFill>
+                <a:latin typeface="맑은 고딕"/>
+              </a:defRPr>
+            </a:pPr>
+            <a:r>
+              <a:t>**진압 시나리오 (Stage 1~2)**: Isaac Sim 로봇 스폰 ➔ 수동/자율 주행 및 라이다 매핑 ➔ Spot 로봇 팔 제어 오버라이드 및 소화기 파지/투척 진압</a:t>
+            </a:r>
+          </a:p>
+          <a:p>
+            <a:pPr lvl="1">
+              <a:spcAft>
+                <a:spcPts val="1000"/>
+              </a:spcAft>
+              <a:defRPr sz="1500">
+                <a:solidFill>
+                  <a:srgbClr val="B4B4B9"/>
+                </a:solidFill>
+                <a:latin typeface="맑은 고딕"/>
+              </a:defRPr>
+            </a:pPr>
+            <a:r>
+              <a:t>**구조 시나리오 (Stage 4~5)**: YOLOv8 실시간 조난자 감지 ➔ 정렬 및 접근 ➔ 에스코트 유도(장애물 팽창 회피 및 Costmap 초기화) ➔ 출구 동시 안전 탈출 완료</a:t>
+            </a:r>
+          </a:p>
+        </p:txBody>
+      </p:sp>
+    </p:spTree>
+  </p:cSld>
+  <p:clrMapOvr>
+    <a:masterClrMapping/>
+  </p:clrMapOvr>
+</p:sld>
+</file>
+
+<file path=ppt/slides/slide45.xml><?xml version="1.0" encoding="utf-8"?>
+<p:sld xmlns:a="http://schemas.openxmlformats.org/drawingml/2006/main" xmlns:p="http://schemas.openxmlformats.org/presentationml/2006/main" xmlns:r="http://schemas.openxmlformats.org/officeDocument/2006/relationships">
+  <p:cSld>
+    <p:bg>
+      <p:bgPr>
+        <a:solidFill>
+          <a:srgbClr val="1A1A1E"/>
+        </a:solidFill>
+        <a:effectLst/>
+      </p:bgPr>
+    </p:bg>
+    <p:spTree>
+      <p:nvGrpSpPr>
+        <p:cNvPr id="1" name=""/>
+        <p:cNvGrpSpPr/>
+        <p:nvPr/>
+      </p:nvGrpSpPr>
+      <p:grpSpPr/>
+      <p:sp>
+        <p:nvSpPr>
+          <p:cNvPr id="2" name="TextBox 1"/>
+          <p:cNvSpPr txBox="1"/>
+          <p:nvPr/>
+        </p:nvSpPr>
+        <p:spPr>
+          <a:xfrm>
+            <a:off x="914400" y="731520"/>
+            <a:ext cx="10362895" cy="914400"/>
+          </a:xfrm>
+          <a:prstGeom prst="rect">
+            <a:avLst/>
+          </a:prstGeom>
+          <a:noFill/>
+        </p:spPr>
+        <p:txBody>
+          <a:bodyPr wrap="square" lIns="0" tIns="0" rIns="0" bIns="0">
+            <a:spAutoFit/>
+          </a:bodyPr>
+          <a:lstStyle/>
+          <a:p>
+            <a:pPr>
+              <a:defRPr sz="2800" b="1">
+                <a:solidFill>
+                  <a:srgbClr val="FF6B6B"/>
+                </a:solidFill>
+                <a:latin typeface="맑은 고딕"/>
+              </a:defRPr>
+            </a:pPr>
+            <a:r>
+              <a:t>Slide 45: 자체 평가의견: 기술적 개선점 및 향후 로드맵</a:t>
+            </a:r>
+          </a:p>
+        </p:txBody>
+      </p:sp>
+      <p:sp>
+        <p:nvSpPr>
+          <p:cNvPr id="3" name="TextBox 2"/>
+          <p:cNvSpPr txBox="1"/>
+          <p:nvPr/>
+        </p:nvSpPr>
+        <p:spPr>
+          <a:xfrm>
+            <a:off x="914400" y="2011680"/>
+            <a:ext cx="10362895" cy="4114800"/>
+          </a:xfrm>
+          <a:prstGeom prst="rect">
+            <a:avLst/>
+          </a:prstGeom>
+          <a:noFill/>
+        </p:spPr>
+        <p:txBody>
+          <a:bodyPr wrap="square" lIns="0" tIns="0" rIns="0" bIns="0">
+            <a:spAutoFit/>
+          </a:bodyPr>
+          <a:lstStyle/>
+          <a:p>
+            <a:pPr lvl="1">
+              <a:spcAft>
+                <a:spcPts val="1000"/>
+              </a:spcAft>
+              <a:defRPr sz="1500">
+                <a:solidFill>
+                  <a:srgbClr val="B4B4B9"/>
+                </a:solidFill>
+                <a:latin typeface="맑은 고딕"/>
+              </a:defRPr>
+            </a:pPr>
+            <a:r>
+              <a:t>**기술적 개선점 (Technical Improvements)**:</a:t>
+            </a:r>
+          </a:p>
+          <a:p>
+            <a:pPr lvl="1">
+              <a:spcAft>
+                <a:spcPts val="1000"/>
+              </a:spcAft>
+              <a:defRPr sz="1500">
+                <a:solidFill>
+                  <a:srgbClr val="B4B4B9"/>
+                </a:solidFill>
+                <a:latin typeface="맑은 고딕"/>
+              </a:defRPr>
+            </a:pPr>
+            <a:r>
+              <a:t>*물리 마찰*: 소화기 릴리즈 시 그리퍼 잔여 마찰력을 zero로 동적 API 변환하여 투척 정확도 보장 필요</a:t>
+            </a:r>
+          </a:p>
+          <a:p>
+            <a:pPr lvl="1">
+              <a:spcAft>
+                <a:spcPts val="1000"/>
+              </a:spcAft>
+              <a:defRPr sz="1500">
+                <a:solidFill>
+                  <a:srgbClr val="B4B4B9"/>
+                </a:solidFill>
+                <a:latin typeface="맑은 고딕"/>
+              </a:defRPr>
+            </a:pPr>
+            <a:r>
+              <a:t>*라이다 간섭*: 화염 연기 파티클의 센서 난반사 오차를 제거하기 위한 Kalman Filter 통신 보완</a:t>
+            </a:r>
+          </a:p>
+          <a:p>
+            <a:pPr lvl="1">
+              <a:spcAft>
+                <a:spcPts val="1000"/>
+              </a:spcAft>
+              <a:defRPr sz="1500">
+                <a:solidFill>
+                  <a:srgbClr val="B4B4B9"/>
+                </a:solidFill>
+                <a:latin typeface="맑은 고딕"/>
+              </a:defRPr>
+            </a:pPr>
+            <a:r>
+              <a:t>*질량 적응 RL*: 중량물 파지 보행 시 도메인 랜더마이징(Domain Randomization)을 반영한 하이퍼 파라미터 재학습</a:t>
+            </a:r>
+          </a:p>
+          <a:p>
+            <a:pPr lvl="1">
+              <a:spcAft>
+                <a:spcPts val="1000"/>
+              </a:spcAft>
+              <a:defRPr sz="1500">
+                <a:solidFill>
+                  <a:srgbClr val="B4B4B9"/>
+                </a:solidFill>
+                <a:latin typeface="맑은 고딕"/>
+              </a:defRPr>
+            </a:pPr>
+            <a:r>
+              <a:t>*동기화*: 시뮬레이터-ROS2 간 비동기 레이턴시 방지를 위해 Real-Time 커널 및 HIL 도입 검토</a:t>
+            </a:r>
+          </a:p>
+          <a:p>
+            <a:pPr lvl="1">
+              <a:spcAft>
+                <a:spcPts val="1000"/>
+              </a:spcAft>
+              <a:defRPr sz="1500">
+                <a:solidFill>
+                  <a:srgbClr val="B4B4B9"/>
+                </a:solidFill>
+                <a:latin typeface="맑은 고딕"/>
+              </a:defRPr>
+            </a:pPr>
+            <a:r>
+              <a:t>**차후 발전 방향 (Future Roadmap)**:</a:t>
+            </a:r>
+          </a:p>
+          <a:p>
+            <a:pPr lvl="1">
+              <a:spcAft>
+                <a:spcPts val="1000"/>
+              </a:spcAft>
+              <a:defRPr sz="1500">
+                <a:solidFill>
+                  <a:srgbClr val="B4B4B9"/>
+                </a:solidFill>
+                <a:latin typeface="맑은 고딕"/>
+              </a:defRPr>
+            </a:pPr>
+            <a:r>
+              <a:t>*1단계 Sim-to-Real*: 검증된 Nav2 및 YOLOv8 가중치를 실물 사족보행 로봇(Spot)에 포팅 및 실물 실증</a:t>
+            </a:r>
+          </a:p>
+          <a:p>
+            <a:pPr lvl="1">
+              <a:spcAft>
+                <a:spcPts val="1000"/>
+              </a:spcAft>
+              <a:defRPr sz="1500">
+                <a:solidFill>
+                  <a:srgbClr val="B4B4B9"/>
+                </a:solidFill>
+                <a:latin typeface="맑은 고딕"/>
+              </a:defRPr>
+            </a:pPr>
+            <a:r>
+              <a:t>*2단계 MARL*: 고정 룰 기반 분업에서 다중 협동 강화학습 기반의 지능형 역할 동적 배분</a:t>
+            </a:r>
+          </a:p>
+          <a:p>
+            <a:pPr lvl="1">
+              <a:spcAft>
+                <a:spcPts val="1000"/>
+              </a:spcAft>
+              <a:defRPr sz="1500">
+                <a:solidFill>
+                  <a:srgbClr val="B4B4B9"/>
+                </a:solidFill>
+                <a:latin typeface="맑은 고딕"/>
+              </a:defRPr>
+            </a:pPr>
+            <a:r>
+              <a:t>*3단계 클라우드*: 5G 기반 중앙 재난 상황 관제 대시보드 연동 시각화</a:t>
+            </a:r>
+          </a:p>
+        </p:txBody>
+      </p:sp>
+    </p:spTree>
+  </p:cSld>
+  <p:clrMapOvr>
+    <a:masterClrMapping/>
+  </p:clrMapOvr>
+</p:sld>
+</file>
+
+<file path=ppt/slides/slide46.xml><?xml version="1.0" encoding="utf-8"?>
+<p:sld xmlns:a="http://schemas.openxmlformats.org/drawingml/2006/main" xmlns:p="http://schemas.openxmlformats.org/presentationml/2006/main" xmlns:r="http://schemas.openxmlformats.org/officeDocument/2006/relationships">
+  <p:cSld>
+    <p:bg>
+      <p:bgPr>
+        <a:solidFill>
+          <a:srgbClr val="1A1A1E"/>
+        </a:solidFill>
+        <a:effectLst/>
+      </p:bgPr>
+    </p:bg>
+    <p:spTree>
+      <p:nvGrpSpPr>
+        <p:cNvPr id="1" name=""/>
+        <p:cNvGrpSpPr/>
+        <p:nvPr/>
+      </p:nvGrpSpPr>
+      <p:grpSpPr/>
+      <p:sp>
+        <p:nvSpPr>
+          <p:cNvPr id="2" name="TextBox 1"/>
+          <p:cNvSpPr txBox="1"/>
+          <p:nvPr/>
+        </p:nvSpPr>
+        <p:spPr>
+          <a:xfrm>
+            <a:off x="914400" y="731520"/>
+            <a:ext cx="10362895" cy="914400"/>
+          </a:xfrm>
+          <a:prstGeom prst="rect">
+            <a:avLst/>
+          </a:prstGeom>
+          <a:noFill/>
+        </p:spPr>
+        <p:txBody>
+          <a:bodyPr wrap="square" lIns="0" tIns="0" rIns="0" bIns="0">
+            <a:spAutoFit/>
+          </a:bodyPr>
+          <a:lstStyle/>
+          <a:p>
+            <a:pPr>
+              <a:defRPr sz="2800" b="1">
+                <a:solidFill>
+                  <a:srgbClr val="FF6B6B"/>
+                </a:solidFill>
+                <a:latin typeface="맑은 고딕"/>
+              </a:defRPr>
+            </a:pPr>
+            <a:r>
+              <a:t>Slide 46: 자체 평가의견: 성과 및 한계 (Well-Done &amp; Limitations)</a:t>
+            </a:r>
+          </a:p>
+        </p:txBody>
+      </p:sp>
+      <p:sp>
+        <p:nvSpPr>
+          <p:cNvPr id="3" name="TextBox 2"/>
+          <p:cNvSpPr txBox="1"/>
+          <p:nvPr/>
+        </p:nvSpPr>
+        <p:spPr>
+          <a:xfrm>
+            <a:off x="914400" y="2011680"/>
+            <a:ext cx="10362895" cy="4114800"/>
+          </a:xfrm>
+          <a:prstGeom prst="rect">
+            <a:avLst/>
+          </a:prstGeom>
+          <a:noFill/>
+        </p:spPr>
+        <p:txBody>
+          <a:bodyPr wrap="square" lIns="0" tIns="0" rIns="0" bIns="0">
+            <a:spAutoFit/>
+          </a:bodyPr>
+          <a:lstStyle/>
+          <a:p>
+            <a:pPr lvl="1">
+              <a:spcAft>
+                <a:spcPts val="1000"/>
+              </a:spcAft>
+              <a:defRPr sz="1500">
+                <a:solidFill>
+                  <a:srgbClr val="B4B4B9"/>
+                </a:solidFill>
+                <a:latin typeface="맑은 고딕"/>
+              </a:defRPr>
+            </a:pPr>
+            <a:r>
+              <a:t>**Well-Done (잘한 점)**:</a:t>
+            </a:r>
+          </a:p>
+          <a:p>
+            <a:pPr lvl="1">
+              <a:spcAft>
+                <a:spcPts val="1000"/>
+              </a:spcAft>
+              <a:defRPr sz="1500">
+                <a:solidFill>
+                  <a:srgbClr val="B4B4B9"/>
+                </a:solidFill>
+                <a:latin typeface="맑은 고딕"/>
+              </a:defRPr>
+            </a:pPr>
+            <a:r>
+              <a:t>*완전 자동화*: 인간의 개입을 배제한 로봇 2대의 시나리오 100% 자율 완수</a:t>
+            </a:r>
+          </a:p>
+          <a:p>
+            <a:pPr lvl="1">
+              <a:spcAft>
+                <a:spcPts val="1000"/>
+              </a:spcAft>
+              <a:defRPr sz="1500">
+                <a:solidFill>
+                  <a:srgbClr val="B4B4B9"/>
+                </a:solidFill>
+                <a:latin typeface="맑은 고딕"/>
+              </a:defRPr>
+            </a:pPr>
+            <a:r>
+              <a:t>*결함 돌파*: DDS 병목, RL 전복, 좌표 오차 등 8대 난제를 코딩으로 극복</a:t>
+            </a:r>
+          </a:p>
+          <a:p>
+            <a:pPr lvl="1">
+              <a:spcAft>
+                <a:spcPts val="1000"/>
+              </a:spcAft>
+              <a:defRPr sz="1500">
+                <a:solidFill>
+                  <a:srgbClr val="B4B4B9"/>
+                </a:solidFill>
+                <a:latin typeface="맑은 고딕"/>
+              </a:defRPr>
+            </a:pPr>
+            <a:r>
+              <a:t>*문서화 기여*: 시스템 아키텍처 및 상세 설계를 8대 Mermaid 다이어그램으로 완비</a:t>
+            </a:r>
+          </a:p>
+          <a:p>
+            <a:pPr lvl="1">
+              <a:spcAft>
+                <a:spcPts val="1000"/>
+              </a:spcAft>
+              <a:defRPr sz="1500">
+                <a:solidFill>
+                  <a:srgbClr val="B4B4B9"/>
+                </a:solidFill>
+                <a:latin typeface="맑은 고딕"/>
+              </a:defRPr>
+            </a:pPr>
+            <a:r>
+              <a:t>**Limitations (아쉬웠던 점)**:</a:t>
+            </a:r>
+          </a:p>
+          <a:p>
+            <a:pPr lvl="1">
+              <a:spcAft>
+                <a:spcPts val="1000"/>
+              </a:spcAft>
+              <a:defRPr sz="1500">
+                <a:solidFill>
+                  <a:srgbClr val="B4B4B9"/>
+                </a:solidFill>
+                <a:latin typeface="맑은 고딕"/>
+              </a:defRPr>
+            </a:pPr>
+            <a:r>
+              <a:t>*상태 진단 누락*: 조난자 단순 식별 외 화상/의식 여부 등 정밀 진료(Triage) 부재</a:t>
+            </a:r>
+          </a:p>
+          <a:p>
+            <a:pPr lvl="1">
+              <a:spcAft>
+                <a:spcPts val="1000"/>
+              </a:spcAft>
+              <a:defRPr sz="1500">
+                <a:solidFill>
+                  <a:srgbClr val="B4B4B9"/>
+                </a:solidFill>
+                <a:latin typeface="맑은 고딕"/>
+              </a:defRPr>
+            </a:pPr>
+            <a:r>
+              <a:t>*동적 경로 지연*: 화재 확산 점을 실시간 장애물 맵핑하는 연산 속도의 소폭 저하</a:t>
+            </a:r>
+          </a:p>
+          <a:p>
+            <a:pPr lvl="1">
+              <a:spcAft>
+                <a:spcPts val="1000"/>
+              </a:spcAft>
+              <a:defRPr sz="1500">
+                <a:solidFill>
+                  <a:srgbClr val="B4B4B9"/>
+                </a:solidFill>
+                <a:latin typeface="맑은 고딕"/>
+              </a:defRPr>
+            </a:pPr>
+            <a:r>
+              <a:t>*단일 의존성*: 소화기 스폰 개수가 1개여서 투척 실패 시 대안이 없는 단일 실패점</a:t>
+            </a:r>
+          </a:p>
+        </p:txBody>
+      </p:sp>
+    </p:spTree>
+  </p:cSld>
+  <p:clrMapOvr>
+    <a:masterClrMapping/>
+  </p:clrMapOvr>
+</p:sld>
+</file>
+
+<file path=ppt/slides/slide47.xml><?xml version="1.0" encoding="utf-8"?>
+<p:sld xmlns:a="http://schemas.openxmlformats.org/drawingml/2006/main" xmlns:p="http://schemas.openxmlformats.org/presentationml/2006/main" xmlns:r="http://schemas.openxmlformats.org/officeDocument/2006/relationships">
+  <p:cSld>
+    <p:bg>
+      <p:bgPr>
+        <a:solidFill>
+          <a:srgbClr val="1A1A1E"/>
+        </a:solidFill>
+        <a:effectLst/>
+      </p:bgPr>
+    </p:bg>
+    <p:spTree>
+      <p:nvGrpSpPr>
+        <p:cNvPr id="1" name=""/>
+        <p:cNvGrpSpPr/>
+        <p:nvPr/>
+      </p:nvGrpSpPr>
+      <p:grpSpPr/>
+      <p:sp>
+        <p:nvSpPr>
+          <p:cNvPr id="2" name="TextBox 1"/>
+          <p:cNvSpPr txBox="1"/>
+          <p:nvPr/>
+        </p:nvSpPr>
+        <p:spPr>
+          <a:xfrm>
+            <a:off x="914400" y="731520"/>
+            <a:ext cx="10362895" cy="914400"/>
+          </a:xfrm>
+          <a:prstGeom prst="rect">
+            <a:avLst/>
+          </a:prstGeom>
+          <a:noFill/>
+        </p:spPr>
+        <p:txBody>
+          <a:bodyPr wrap="square" lIns="0" tIns="0" rIns="0" bIns="0">
+            <a:spAutoFit/>
+          </a:bodyPr>
+          <a:lstStyle/>
+          <a:p>
+            <a:pPr>
+              <a:defRPr sz="2800" b="1">
+                <a:solidFill>
+                  <a:srgbClr val="FF6B6B"/>
+                </a:solidFill>
+                <a:latin typeface="맑은 고딕"/>
+              </a:defRPr>
+            </a:pPr>
+            <a:r>
+              <a:t>Slide 47: Q &amp; A</a:t>
             </a:r>
           </a:p>
         </p:txBody>
@@ -12007,7 +12587,7 @@
               </a:defRPr>
             </a:pPr>
             <a:r>
-              <a:t>**협동 시스템의 장점**:</a:t>
+              <a:t>**개별 특화 메커니즘**:</a:t>
             </a:r>
           </a:p>
           <a:p>
@@ -12502,7 +13082,7 @@
               </a:defRPr>
             </a:pPr>
             <a:r>
-              <a:t>**4단계 (통합 및 디버깅)**: 5개 스테이지별 점진적 쉘 스크립트 실행 및 트러블슈팅 (7~8주)</a:t>
+              <a:t>**4단계 (통합 및 디버깅)**: run_stage5.sh 시나리오 런타임 단계별 통합 디버깅 (7~8주)</a:t>
             </a:r>
           </a:p>
           <a:p>
